--- a/Exercises/L5-Exercises ANS.pptx
+++ b/Exercises/L5-Exercises ANS.pptx
@@ -5,25 +5,27 @@
     <p:sldMasterId id="2147483648" r:id="rId1"/>
   </p:sldMasterIdLst>
   <p:notesMasterIdLst>
-    <p:notesMasterId r:id="rId24"/>
+    <p:notesMasterId r:id="rId17"/>
   </p:notesMasterIdLst>
   <p:handoutMasterIdLst>
-    <p:handoutMasterId r:id="rId25"/>
+    <p:handoutMasterId r:id="rId18"/>
   </p:handoutMasterIdLst>
   <p:sldIdLst>
-    <p:sldId id="256" r:id="rId10"/>
-    <p:sldId id="257" r:id="rId11"/>
-    <p:sldId id="258" r:id="rId12"/>
-    <p:sldId id="259" r:id="rId13"/>
-    <p:sldId id="260" r:id="rId14"/>
-    <p:sldId id="261" r:id="rId15"/>
-    <p:sldId id="262" r:id="rId16"/>
-    <p:sldId id="263" r:id="rId17"/>
-    <p:sldId id="264" r:id="rId18"/>
-    <p:sldId id="265" r:id="rId19"/>
-    <p:sldId id="266" r:id="rId20"/>
-    <p:sldId id="267" r:id="rId21"/>
-    <p:sldId id="268" r:id="rId22"/>
+    <p:sldId id="256" r:id="rId2"/>
+    <p:sldId id="257" r:id="rId3"/>
+    <p:sldId id="258" r:id="rId4"/>
+    <p:sldId id="269" r:id="rId5"/>
+    <p:sldId id="270" r:id="rId6"/>
+    <p:sldId id="259" r:id="rId7"/>
+    <p:sldId id="260" r:id="rId8"/>
+    <p:sldId id="261" r:id="rId9"/>
+    <p:sldId id="262" r:id="rId10"/>
+    <p:sldId id="263" r:id="rId11"/>
+    <p:sldId id="264" r:id="rId12"/>
+    <p:sldId id="265" r:id="rId13"/>
+    <p:sldId id="266" r:id="rId14"/>
+    <p:sldId id="267" r:id="rId15"/>
+    <p:sldId id="268" r:id="rId16"/>
   </p:sldIdLst>
   <p:sldSz cx="12192000" cy="6858000"/>
   <p:notesSz cx="9601200" cy="7315200"/>
@@ -3930,7 +3932,7 @@
 </file>
 
 <file path=ppt/slides/slide1.xml><?xml version="1.0" encoding="utf-8"?>
-<p:sld xmlns:a="http://schemas.openxmlformats.org/drawingml/2006/main" xmlns:p="http://schemas.openxmlformats.org/presentationml/2006/main" xmlns:r="http://schemas.openxmlformats.org/officeDocument/2006/relationships">
+<p:sld xmlns:a="http://schemas.openxmlformats.org/drawingml/2006/main" xmlns:r="http://schemas.openxmlformats.org/officeDocument/2006/relationships" xmlns:p="http://schemas.openxmlformats.org/presentationml/2006/main">
   <p:cSld>
     <p:spTree>
       <p:nvGrpSpPr>
@@ -3938,7 +3940,14 @@
         <p:cNvGrpSpPr/>
         <p:nvPr/>
       </p:nvGrpSpPr>
-      <p:grpSpPr/>
+      <p:grpSpPr>
+        <a:xfrm>
+          <a:off x="0" y="0"/>
+          <a:ext cx="0" cy="0"/>
+          <a:chOff x="0" y="0"/>
+          <a:chExt cx="0" cy="0"/>
+        </a:xfrm>
+      </p:grpSpPr>
       <p:sp>
         <p:nvSpPr>
           <p:cNvPr id="2" name="Title 1"/>
@@ -4028,7 +4037,7 @@
 </file>
 
 <file path=ppt/slides/slide10.xml><?xml version="1.0" encoding="utf-8"?>
-<p:sld xmlns:a="http://schemas.openxmlformats.org/drawingml/2006/main" xmlns:p="http://schemas.openxmlformats.org/presentationml/2006/main" xmlns:r="http://schemas.openxmlformats.org/officeDocument/2006/relationships">
+<p:sld xmlns:a="http://schemas.openxmlformats.org/drawingml/2006/main" xmlns:r="http://schemas.openxmlformats.org/officeDocument/2006/relationships" xmlns:p="http://schemas.openxmlformats.org/presentationml/2006/main">
   <p:cSld>
     <p:spTree>
       <p:nvGrpSpPr>
@@ -4036,7 +4045,341 @@
         <p:cNvGrpSpPr/>
         <p:nvPr/>
       </p:nvGrpSpPr>
-      <p:grpSpPr/>
+      <p:grpSpPr>
+        <a:xfrm>
+          <a:off x="0" y="0"/>
+          <a:ext cx="0" cy="0"/>
+          <a:chOff x="0" y="0"/>
+          <a:chExt cx="0" cy="0"/>
+        </a:xfrm>
+      </p:grpSpPr>
+      <p:sp>
+        <p:nvSpPr>
+          <p:cNvPr id="2" name="Title 1"/>
+          <p:cNvSpPr>
+            <a:spLocks noGrp="1"/>
+          </p:cNvSpPr>
+          <p:nvPr>
+            <p:ph type="title"/>
+          </p:nvPr>
+        </p:nvSpPr>
+        <p:spPr>
+          <a:xfrm>
+            <a:off x="1320800" y="152400"/>
+            <a:ext cx="9575800" cy="533400"/>
+          </a:xfrm>
+        </p:spPr>
+        <p:txBody>
+          <a:bodyPr/>
+          <a:lstStyle/>
+          <a:p>
+            <a:r>
+              <a:t>Exercise: Realistic YOLO dimensions</a:t>
+            </a:r>
+          </a:p>
+        </p:txBody>
+      </p:sp>
+      <p:sp>
+        <p:nvSpPr>
+          <p:cNvPr id="3" name="Content Placeholder 2"/>
+          <p:cNvSpPr>
+            <a:spLocks noGrp="1"/>
+          </p:cNvSpPr>
+          <p:nvPr>
+            <p:ph idx="1"/>
+          </p:nvPr>
+        </p:nvSpPr>
+        <p:spPr>
+          <a:xfrm>
+            <a:off x="330000" y="800000"/>
+            <a:ext cx="11500000" cy="5500000"/>
+          </a:xfrm>
+        </p:spPr>
+        <p:txBody>
+          <a:bodyPr wrap="square"/>
+          <a:lstStyle/>
+          <a:p>
+            <a:pPr marL="0" indent="0">
+              <a:buNone/>
+            </a:pPr>
+            <a:r>
+              <a:rPr sz="2400"/>
+              <a:t>A realistic YOLO takes a </a:t>
+            </a:r>
+            <a:r>
+              <a:rPr sz="2400" b="1">
+                <a:solidFill>
+                  <a:srgbClr val="2A40E2"/>
+                </a:solidFill>
+              </a:rPr>
+              <a:t>608 × 608 × 3</a:t>
+            </a:r>
+            <a:r>
+              <a:rPr sz="2400"/>
+              <a:t> image and outputs a </a:t>
+            </a:r>
+            <a:r>
+              <a:rPr sz="2400" b="1">
+                <a:solidFill>
+                  <a:srgbClr val="2A40E2"/>
+                </a:solidFill>
+              </a:rPr>
+              <a:t>19 × 19 × 5 × 85</a:t>
+            </a:r>
+            <a:r>
+              <a:rPr sz="2400"/>
+              <a:t> tensor.</a:t>
+            </a:r>
+          </a:p>
+          <a:p>
+            <a:pPr marL="0" indent="0">
+              <a:buNone/>
+            </a:pPr>
+            <a:r>
+              <a:rPr sz="800"/>
+              <a:t> </a:t>
+            </a:r>
+          </a:p>
+          <a:p>
+            <a:pPr marL="0" indent="0">
+              <a:buNone/>
+            </a:pPr>
+            <a:r>
+              <a:rPr sz="2400"/>
+              <a:t>(a) What do 5 and 85 stand for?</a:t>
+            </a:r>
+          </a:p>
+          <a:p>
+            <a:pPr marL="0" indent="0">
+              <a:buNone/>
+            </a:pPr>
+            <a:r>
+              <a:rPr sz="2400"/>
+              <a:t>(b) How many numbers are predicted, and how many candidate boxes enter NMS?</a:t>
+            </a:r>
+          </a:p>
+          <a:p>
+            <a:pPr marL="0" indent="0">
+              <a:buNone/>
+            </a:pPr>
+            <a:r>
+              <a:rPr sz="2400"/>
+              <a:t>(c) What is the stride (pixels per grid cell)? In which cell (row, col from 0) does an object with mid-point at pixel (330, 200) fall, and what are (bx, by) of its label?</a:t>
+            </a:r>
+          </a:p>
+        </p:txBody>
+      </p:sp>
+    </p:spTree>
+  </p:cSld>
+  <p:clrMapOvr>
+    <a:masterClrMapping/>
+  </p:clrMapOvr>
+</p:sld>
+</file>
+
+<file path=ppt/slides/slide11.xml><?xml version="1.0" encoding="utf-8"?>
+<p:sld xmlns:a="http://schemas.openxmlformats.org/drawingml/2006/main" xmlns:r="http://schemas.openxmlformats.org/officeDocument/2006/relationships" xmlns:p="http://schemas.openxmlformats.org/presentationml/2006/main">
+  <p:cSld>
+    <p:spTree>
+      <p:nvGrpSpPr>
+        <p:cNvPr id="1" name=""/>
+        <p:cNvGrpSpPr/>
+        <p:nvPr/>
+      </p:nvGrpSpPr>
+      <p:grpSpPr>
+        <a:xfrm>
+          <a:off x="0" y="0"/>
+          <a:ext cx="0" cy="0"/>
+          <a:chOff x="0" y="0"/>
+          <a:chExt cx="0" cy="0"/>
+        </a:xfrm>
+      </p:grpSpPr>
+      <p:sp>
+        <p:nvSpPr>
+          <p:cNvPr id="2" name="Title 1"/>
+          <p:cNvSpPr>
+            <a:spLocks noGrp="1"/>
+          </p:cNvSpPr>
+          <p:nvPr>
+            <p:ph type="title"/>
+          </p:nvPr>
+        </p:nvSpPr>
+        <p:spPr>
+          <a:xfrm>
+            <a:off x="1320800" y="152400"/>
+            <a:ext cx="9575800" cy="533400"/>
+          </a:xfrm>
+        </p:spPr>
+        <p:txBody>
+          <a:bodyPr/>
+          <a:lstStyle/>
+          <a:p>
+            <a:r>
+              <a:t>Exercise Solution: Realistic YOLO dimensions</a:t>
+            </a:r>
+          </a:p>
+        </p:txBody>
+      </p:sp>
+      <p:sp>
+        <p:nvSpPr>
+          <p:cNvPr id="3" name="Content Placeholder 2"/>
+          <p:cNvSpPr>
+            <a:spLocks noGrp="1"/>
+          </p:cNvSpPr>
+          <p:nvPr>
+            <p:ph idx="1"/>
+          </p:nvPr>
+        </p:nvSpPr>
+        <p:spPr>
+          <a:xfrm>
+            <a:off x="330000" y="800000"/>
+            <a:ext cx="11500000" cy="5500000"/>
+          </a:xfrm>
+        </p:spPr>
+        <p:txBody>
+          <a:bodyPr wrap="square"/>
+          <a:lstStyle/>
+          <a:p>
+            <a:r>
+              <a:rPr sz="2400"/>
+              <a:t>(a) </a:t>
+            </a:r>
+            <a:r>
+              <a:rPr sz="2400" b="1">
+                <a:solidFill>
+                  <a:srgbClr val="2A40E2"/>
+                </a:solidFill>
+              </a:rPr>
+              <a:t>5 anchor boxes</a:t>
+            </a:r>
+            <a:r>
+              <a:rPr sz="2400"/>
+              <a:t> per cell; 85 = 5 + 80: (pc, bx, by, bh, bw) plus </a:t>
+            </a:r>
+            <a:r>
+              <a:rPr sz="2400" b="1">
+                <a:solidFill>
+                  <a:srgbClr val="2A40E2"/>
+                </a:solidFill>
+              </a:rPr>
+              <a:t>80 class scores</a:t>
+            </a:r>
+            <a:r>
+              <a:rPr sz="2400"/>
+              <a:t>.</a:t>
+            </a:r>
+          </a:p>
+          <a:p>
+            <a:r>
+              <a:rPr sz="2400"/>
+              <a:t>(b) 19 × 19 × 5 × 85 = </a:t>
+            </a:r>
+            <a:r>
+              <a:rPr sz="2400" b="1">
+                <a:solidFill>
+                  <a:srgbClr val="2A40E2"/>
+                </a:solidFill>
+              </a:rPr>
+              <a:t>153,425</a:t>
+            </a:r>
+            <a:r>
+              <a:rPr sz="2400"/>
+              <a:t> numbers; 19 × 19 × 5 = </a:t>
+            </a:r>
+            <a:r>
+              <a:rPr sz="2400" b="1">
+                <a:solidFill>
+                  <a:srgbClr val="2A40E2"/>
+                </a:solidFill>
+              </a:rPr>
+              <a:t>1,805</a:t>
+            </a:r>
+            <a:r>
+              <a:rPr sz="2400"/>
+              <a:t> candidate boxes before NMS.</a:t>
+            </a:r>
+          </a:p>
+          <a:p>
+            <a:r>
+              <a:rPr sz="2400"/>
+              <a:t>(c) Stride 608/19 = </a:t>
+            </a:r>
+            <a:r>
+              <a:rPr sz="2400" b="1">
+                <a:solidFill>
+                  <a:srgbClr val="2A40E2"/>
+                </a:solidFill>
+              </a:rPr>
+              <a:t>32 px</a:t>
+            </a:r>
+            <a:r>
+              <a:rPr sz="2400"/>
+              <a:t>. col = ⌊330/32⌋ = 10, row = ⌊200/32⌋ = 6 → </a:t>
+            </a:r>
+            <a:r>
+              <a:rPr sz="2400" b="1">
+                <a:solidFill>
+                  <a:srgbClr val="2A40E2"/>
+                </a:solidFill>
+              </a:rPr>
+              <a:t>cell (6, 10)</a:t>
+            </a:r>
+            <a:r>
+              <a:rPr sz="2400"/>
+              <a:t>; bx = (330 − 320)/32 = </a:t>
+            </a:r>
+            <a:r>
+              <a:rPr sz="2400" b="1">
+                <a:solidFill>
+                  <a:srgbClr val="2A40E2"/>
+                </a:solidFill>
+              </a:rPr>
+              <a:t>0.31</a:t>
+            </a:r>
+            <a:r>
+              <a:rPr sz="2400"/>
+              <a:t>, by = (200 − 192)/32 = </a:t>
+            </a:r>
+            <a:r>
+              <a:rPr sz="2400" b="1">
+                <a:solidFill>
+                  <a:srgbClr val="2A40E2"/>
+                </a:solidFill>
+              </a:rPr>
+              <a:t>0.25</a:t>
+            </a:r>
+            <a:r>
+              <a:rPr sz="2400"/>
+              <a:t>.</a:t>
+            </a:r>
+          </a:p>
+        </p:txBody>
+      </p:sp>
+    </p:spTree>
+  </p:cSld>
+  <p:clrMapOvr>
+    <a:masterClrMapping/>
+  </p:clrMapOvr>
+</p:sld>
+</file>
+
+<file path=ppt/slides/slide12.xml><?xml version="1.0" encoding="utf-8"?>
+<p:sld xmlns:a="http://schemas.openxmlformats.org/drawingml/2006/main" xmlns:r="http://schemas.openxmlformats.org/officeDocument/2006/relationships" xmlns:p="http://schemas.openxmlformats.org/presentationml/2006/main">
+  <p:cSld>
+    <p:spTree>
+      <p:nvGrpSpPr>
+        <p:cNvPr id="1" name=""/>
+        <p:cNvGrpSpPr/>
+        <p:nvPr/>
+      </p:nvGrpSpPr>
+      <p:grpSpPr>
+        <a:xfrm>
+          <a:off x="0" y="0"/>
+          <a:ext cx="0" cy="0"/>
+          <a:chOff x="0" y="0"/>
+          <a:chExt cx="0" cy="0"/>
+        </a:xfrm>
+      </p:grpSpPr>
       <p:sp>
         <p:nvSpPr>
           <p:cNvPr id="2" name="Title 1"/>
@@ -4179,7 +4522,7 @@
           <a:noFill/>
         </p:spPr>
         <p:txBody>
-          <a:bodyPr wrap="square" lIns="36000" rIns="36000" tIns="18000" bIns="18000">
+          <a:bodyPr wrap="square" lIns="36000" tIns="18000" rIns="36000" bIns="18000">
             <a:spAutoFit/>
           </a:bodyPr>
           <a:lstStyle/>
@@ -4206,17 +4549,29 @@
         <a:graphic>
           <a:graphicData uri="http://schemas.openxmlformats.org/drawingml/2006/table">
             <a:tbl>
-              <a:tblPr firstRow="0" bandRow="0">
+              <a:tblPr>
                 <a:tableStyleId>{5940675A-B579-460E-94D1-54222C63F5DA}</a:tableStyleId>
               </a:tblPr>
               <a:tblGrid>
-                <a:gridCol w="560000"/>
-                <a:gridCol w="560000"/>
+                <a:gridCol w="560000">
+                  <a:extLst>
+                    <a:ext uri="{9D8B030D-6E8A-4147-A177-3AD203B41FA5}">
+                      <a16:colId xmlns:a16="http://schemas.microsoft.com/office/drawing/2014/main" val="20000"/>
+                    </a:ext>
+                  </a:extLst>
+                </a:gridCol>
+                <a:gridCol w="560000">
+                  <a:extLst>
+                    <a:ext uri="{9D8B030D-6E8A-4147-A177-3AD203B41FA5}">
+                      <a16:colId xmlns:a16="http://schemas.microsoft.com/office/drawing/2014/main" val="20001"/>
+                    </a:ext>
+                  </a:extLst>
+                </a:gridCol>
               </a:tblGrid>
               <a:tr h="460000">
                 <a:tc>
                   <a:txBody>
-                    <a:bodyPr wrap="square"/>
+                    <a:bodyPr/>
                     <a:lstStyle/>
                     <a:p>
                       <a:pPr algn="ctr"/>
@@ -4230,7 +4585,7 @@
                 </a:tc>
                 <a:tc>
                   <a:txBody>
-                    <a:bodyPr wrap="square"/>
+                    <a:bodyPr/>
                     <a:lstStyle/>
                     <a:p>
                       <a:pPr algn="ctr"/>
@@ -4242,11 +4597,16 @@
                   </a:txBody>
                   <a:tcPr marL="60000" marR="60000" marT="25000" marB="25000" anchor="ctr"/>
                 </a:tc>
+                <a:extLst>
+                  <a:ext uri="{0D108BD9-81ED-4DB2-BD59-A6C34878D82A}">
+                    <a16:rowId xmlns:a16="http://schemas.microsoft.com/office/drawing/2014/main" val="10000"/>
+                  </a:ext>
+                </a:extLst>
               </a:tr>
               <a:tr h="460000">
                 <a:tc>
                   <a:txBody>
-                    <a:bodyPr wrap="square"/>
+                    <a:bodyPr/>
                     <a:lstStyle/>
                     <a:p>
                       <a:pPr algn="ctr"/>
@@ -4260,7 +4620,7 @@
                 </a:tc>
                 <a:tc>
                   <a:txBody>
-                    <a:bodyPr wrap="square"/>
+                    <a:bodyPr/>
                     <a:lstStyle/>
                     <a:p>
                       <a:pPr algn="ctr"/>
@@ -4272,6 +4632,11 @@
                   </a:txBody>
                   <a:tcPr marL="60000" marR="60000" marT="25000" marB="25000" anchor="ctr"/>
                 </a:tc>
+                <a:extLst>
+                  <a:ext uri="{0D108BD9-81ED-4DB2-BD59-A6C34878D82A}">
+                    <a16:rowId xmlns:a16="http://schemas.microsoft.com/office/drawing/2014/main" val="10001"/>
+                  </a:ext>
+                </a:extLst>
               </a:tr>
             </a:tbl>
           </a:graphicData>
@@ -4294,7 +4659,7 @@
           <a:noFill/>
         </p:spPr>
         <p:txBody>
-          <a:bodyPr wrap="square" lIns="36000" rIns="36000" tIns="18000" bIns="18000">
+          <a:bodyPr wrap="square" lIns="36000" tIns="18000" rIns="36000" bIns="18000">
             <a:spAutoFit/>
           </a:bodyPr>
           <a:lstStyle/>
@@ -4323,7 +4688,7 @@
           <a:noFill/>
         </p:spPr>
         <p:txBody>
-          <a:bodyPr wrap="square" lIns="36000" rIns="36000" tIns="18000" bIns="18000">
+          <a:bodyPr wrap="square" lIns="36000" tIns="18000" rIns="36000" bIns="18000">
             <a:spAutoFit/>
           </a:bodyPr>
           <a:lstStyle/>
@@ -4350,19 +4715,43 @@
         <a:graphic>
           <a:graphicData uri="http://schemas.openxmlformats.org/drawingml/2006/table">
             <a:tbl>
-              <a:tblPr firstRow="0" bandRow="0">
+              <a:tblPr>
                 <a:tableStyleId>{5940675A-B579-460E-94D1-54222C63F5DA}</a:tableStyleId>
               </a:tblPr>
               <a:tblGrid>
-                <a:gridCol w="560000"/>
-                <a:gridCol w="560000"/>
-                <a:gridCol w="560000"/>
-                <a:gridCol w="560000"/>
+                <a:gridCol w="560000">
+                  <a:extLst>
+                    <a:ext uri="{9D8B030D-6E8A-4147-A177-3AD203B41FA5}">
+                      <a16:colId xmlns:a16="http://schemas.microsoft.com/office/drawing/2014/main" val="20000"/>
+                    </a:ext>
+                  </a:extLst>
+                </a:gridCol>
+                <a:gridCol w="560000">
+                  <a:extLst>
+                    <a:ext uri="{9D8B030D-6E8A-4147-A177-3AD203B41FA5}">
+                      <a16:colId xmlns:a16="http://schemas.microsoft.com/office/drawing/2014/main" val="20001"/>
+                    </a:ext>
+                  </a:extLst>
+                </a:gridCol>
+                <a:gridCol w="560000">
+                  <a:extLst>
+                    <a:ext uri="{9D8B030D-6E8A-4147-A177-3AD203B41FA5}">
+                      <a16:colId xmlns:a16="http://schemas.microsoft.com/office/drawing/2014/main" val="20002"/>
+                    </a:ext>
+                  </a:extLst>
+                </a:gridCol>
+                <a:gridCol w="560000">
+                  <a:extLst>
+                    <a:ext uri="{9D8B030D-6E8A-4147-A177-3AD203B41FA5}">
+                      <a16:colId xmlns:a16="http://schemas.microsoft.com/office/drawing/2014/main" val="20003"/>
+                    </a:ext>
+                  </a:extLst>
+                </a:gridCol>
               </a:tblGrid>
               <a:tr h="460000">
                 <a:tc>
                   <a:txBody>
-                    <a:bodyPr wrap="square"/>
+                    <a:bodyPr/>
                     <a:lstStyle/>
                     <a:p>
                       <a:pPr algn="ctr"/>
@@ -4373,7 +4762,7 @@
                 </a:tc>
                 <a:tc>
                   <a:txBody>
-                    <a:bodyPr wrap="square"/>
+                    <a:bodyPr/>
                     <a:lstStyle/>
                     <a:p>
                       <a:pPr algn="ctr"/>
@@ -4384,7 +4773,7 @@
                 </a:tc>
                 <a:tc>
                   <a:txBody>
-                    <a:bodyPr wrap="square"/>
+                    <a:bodyPr/>
                     <a:lstStyle/>
                     <a:p>
                       <a:pPr algn="ctr"/>
@@ -4395,7 +4784,7 @@
                 </a:tc>
                 <a:tc>
                   <a:txBody>
-                    <a:bodyPr wrap="square"/>
+                    <a:bodyPr/>
                     <a:lstStyle/>
                     <a:p>
                       <a:pPr algn="ctr"/>
@@ -4404,11 +4793,16 @@
                   </a:txBody>
                   <a:tcPr marL="60000" marR="60000" marT="25000" marB="25000" anchor="ctr"/>
                 </a:tc>
+                <a:extLst>
+                  <a:ext uri="{0D108BD9-81ED-4DB2-BD59-A6C34878D82A}">
+                    <a16:rowId xmlns:a16="http://schemas.microsoft.com/office/drawing/2014/main" val="10000"/>
+                  </a:ext>
+                </a:extLst>
               </a:tr>
               <a:tr h="460000">
                 <a:tc>
                   <a:txBody>
-                    <a:bodyPr wrap="square"/>
+                    <a:bodyPr/>
                     <a:lstStyle/>
                     <a:p>
                       <a:pPr algn="ctr"/>
@@ -4419,7 +4813,7 @@
                 </a:tc>
                 <a:tc>
                   <a:txBody>
-                    <a:bodyPr wrap="square"/>
+                    <a:bodyPr/>
                     <a:lstStyle/>
                     <a:p>
                       <a:pPr algn="ctr"/>
@@ -4430,7 +4824,7 @@
                 </a:tc>
                 <a:tc>
                   <a:txBody>
-                    <a:bodyPr wrap="square"/>
+                    <a:bodyPr/>
                     <a:lstStyle/>
                     <a:p>
                       <a:pPr algn="ctr"/>
@@ -4441,7 +4835,7 @@
                 </a:tc>
                 <a:tc>
                   <a:txBody>
-                    <a:bodyPr wrap="square"/>
+                    <a:bodyPr/>
                     <a:lstStyle/>
                     <a:p>
                       <a:pPr algn="ctr"/>
@@ -4450,11 +4844,16 @@
                   </a:txBody>
                   <a:tcPr marL="60000" marR="60000" marT="25000" marB="25000" anchor="ctr"/>
                 </a:tc>
+                <a:extLst>
+                  <a:ext uri="{0D108BD9-81ED-4DB2-BD59-A6C34878D82A}">
+                    <a16:rowId xmlns:a16="http://schemas.microsoft.com/office/drawing/2014/main" val="10001"/>
+                  </a:ext>
+                </a:extLst>
               </a:tr>
               <a:tr h="460000">
                 <a:tc>
                   <a:txBody>
-                    <a:bodyPr wrap="square"/>
+                    <a:bodyPr/>
                     <a:lstStyle/>
                     <a:p>
                       <a:pPr algn="ctr"/>
@@ -4465,7 +4864,7 @@
                 </a:tc>
                 <a:tc>
                   <a:txBody>
-                    <a:bodyPr wrap="square"/>
+                    <a:bodyPr/>
                     <a:lstStyle/>
                     <a:p>
                       <a:pPr algn="ctr"/>
@@ -4476,7 +4875,7 @@
                 </a:tc>
                 <a:tc>
                   <a:txBody>
-                    <a:bodyPr wrap="square"/>
+                    <a:bodyPr/>
                     <a:lstStyle/>
                     <a:p>
                       <a:pPr algn="ctr"/>
@@ -4487,7 +4886,7 @@
                 </a:tc>
                 <a:tc>
                   <a:txBody>
-                    <a:bodyPr wrap="square"/>
+                    <a:bodyPr/>
                     <a:lstStyle/>
                     <a:p>
                       <a:pPr algn="ctr"/>
@@ -4496,11 +4895,16 @@
                   </a:txBody>
                   <a:tcPr marL="60000" marR="60000" marT="25000" marB="25000" anchor="ctr"/>
                 </a:tc>
+                <a:extLst>
+                  <a:ext uri="{0D108BD9-81ED-4DB2-BD59-A6C34878D82A}">
+                    <a16:rowId xmlns:a16="http://schemas.microsoft.com/office/drawing/2014/main" val="10002"/>
+                  </a:ext>
+                </a:extLst>
               </a:tr>
               <a:tr h="460000">
                 <a:tc>
                   <a:txBody>
-                    <a:bodyPr wrap="square"/>
+                    <a:bodyPr/>
                     <a:lstStyle/>
                     <a:p>
                       <a:pPr algn="ctr"/>
@@ -4511,7 +4915,7 @@
                 </a:tc>
                 <a:tc>
                   <a:txBody>
-                    <a:bodyPr wrap="square"/>
+                    <a:bodyPr/>
                     <a:lstStyle/>
                     <a:p>
                       <a:pPr algn="ctr"/>
@@ -4522,7 +4926,7 @@
                 </a:tc>
                 <a:tc>
                   <a:txBody>
-                    <a:bodyPr wrap="square"/>
+                    <a:bodyPr/>
                     <a:lstStyle/>
                     <a:p>
                       <a:pPr algn="ctr"/>
@@ -4533,7 +4937,7 @@
                 </a:tc>
                 <a:tc>
                   <a:txBody>
-                    <a:bodyPr wrap="square"/>
+                    <a:bodyPr/>
                     <a:lstStyle/>
                     <a:p>
                       <a:pPr algn="ctr"/>
@@ -4542,6 +4946,11 @@
                   </a:txBody>
                   <a:tcPr marL="60000" marR="60000" marT="25000" marB="25000" anchor="ctr"/>
                 </a:tc>
+                <a:extLst>
+                  <a:ext uri="{0D108BD9-81ED-4DB2-BD59-A6C34878D82A}">
+                    <a16:rowId xmlns:a16="http://schemas.microsoft.com/office/drawing/2014/main" val="10003"/>
+                  </a:ext>
+                </a:extLst>
               </a:tr>
             </a:tbl>
           </a:graphicData>
@@ -4562,19 +4971,43 @@
         <a:graphic>
           <a:graphicData uri="http://schemas.openxmlformats.org/drawingml/2006/table">
             <a:tbl>
-              <a:tblPr firstRow="0" bandRow="0">
+              <a:tblPr>
                 <a:tableStyleId>{5940675A-B579-460E-94D1-54222C63F5DA}</a:tableStyleId>
               </a:tblPr>
               <a:tblGrid>
-                <a:gridCol w="560000"/>
-                <a:gridCol w="560000"/>
-                <a:gridCol w="560000"/>
-                <a:gridCol w="560000"/>
+                <a:gridCol w="560000">
+                  <a:extLst>
+                    <a:ext uri="{9D8B030D-6E8A-4147-A177-3AD203B41FA5}">
+                      <a16:colId xmlns:a16="http://schemas.microsoft.com/office/drawing/2014/main" val="20000"/>
+                    </a:ext>
+                  </a:extLst>
+                </a:gridCol>
+                <a:gridCol w="560000">
+                  <a:extLst>
+                    <a:ext uri="{9D8B030D-6E8A-4147-A177-3AD203B41FA5}">
+                      <a16:colId xmlns:a16="http://schemas.microsoft.com/office/drawing/2014/main" val="20001"/>
+                    </a:ext>
+                  </a:extLst>
+                </a:gridCol>
+                <a:gridCol w="560000">
+                  <a:extLst>
+                    <a:ext uri="{9D8B030D-6E8A-4147-A177-3AD203B41FA5}">
+                      <a16:colId xmlns:a16="http://schemas.microsoft.com/office/drawing/2014/main" val="20002"/>
+                    </a:ext>
+                  </a:extLst>
+                </a:gridCol>
+                <a:gridCol w="560000">
+                  <a:extLst>
+                    <a:ext uri="{9D8B030D-6E8A-4147-A177-3AD203B41FA5}">
+                      <a16:colId xmlns:a16="http://schemas.microsoft.com/office/drawing/2014/main" val="20003"/>
+                    </a:ext>
+                  </a:extLst>
+                </a:gridCol>
               </a:tblGrid>
               <a:tr h="460000">
                 <a:tc>
                   <a:txBody>
-                    <a:bodyPr wrap="square"/>
+                    <a:bodyPr/>
                     <a:lstStyle/>
                     <a:p>
                       <a:pPr algn="ctr"/>
@@ -4585,7 +5018,7 @@
                 </a:tc>
                 <a:tc>
                   <a:txBody>
-                    <a:bodyPr wrap="square"/>
+                    <a:bodyPr/>
                     <a:lstStyle/>
                     <a:p>
                       <a:pPr algn="ctr"/>
@@ -4596,7 +5029,7 @@
                 </a:tc>
                 <a:tc>
                   <a:txBody>
-                    <a:bodyPr wrap="square"/>
+                    <a:bodyPr/>
                     <a:lstStyle/>
                     <a:p>
                       <a:pPr algn="ctr"/>
@@ -4607,7 +5040,7 @@
                 </a:tc>
                 <a:tc>
                   <a:txBody>
-                    <a:bodyPr wrap="square"/>
+                    <a:bodyPr/>
                     <a:lstStyle/>
                     <a:p>
                       <a:pPr algn="ctr"/>
@@ -4616,11 +5049,16 @@
                   </a:txBody>
                   <a:tcPr marL="60000" marR="60000" marT="25000" marB="25000" anchor="ctr"/>
                 </a:tc>
+                <a:extLst>
+                  <a:ext uri="{0D108BD9-81ED-4DB2-BD59-A6C34878D82A}">
+                    <a16:rowId xmlns:a16="http://schemas.microsoft.com/office/drawing/2014/main" val="10000"/>
+                  </a:ext>
+                </a:extLst>
               </a:tr>
               <a:tr h="460000">
                 <a:tc>
                   <a:txBody>
-                    <a:bodyPr wrap="square"/>
+                    <a:bodyPr/>
                     <a:lstStyle/>
                     <a:p>
                       <a:pPr algn="ctr"/>
@@ -4631,7 +5069,7 @@
                 </a:tc>
                 <a:tc>
                   <a:txBody>
-                    <a:bodyPr wrap="square"/>
+                    <a:bodyPr/>
                     <a:lstStyle/>
                     <a:p>
                       <a:pPr algn="ctr"/>
@@ -4642,7 +5080,7 @@
                 </a:tc>
                 <a:tc>
                   <a:txBody>
-                    <a:bodyPr wrap="square"/>
+                    <a:bodyPr/>
                     <a:lstStyle/>
                     <a:p>
                       <a:pPr algn="ctr"/>
@@ -4653,7 +5091,7 @@
                 </a:tc>
                 <a:tc>
                   <a:txBody>
-                    <a:bodyPr wrap="square"/>
+                    <a:bodyPr/>
                     <a:lstStyle/>
                     <a:p>
                       <a:pPr algn="ctr"/>
@@ -4662,11 +5100,16 @@
                   </a:txBody>
                   <a:tcPr marL="60000" marR="60000" marT="25000" marB="25000" anchor="ctr"/>
                 </a:tc>
+                <a:extLst>
+                  <a:ext uri="{0D108BD9-81ED-4DB2-BD59-A6C34878D82A}">
+                    <a16:rowId xmlns:a16="http://schemas.microsoft.com/office/drawing/2014/main" val="10001"/>
+                  </a:ext>
+                </a:extLst>
               </a:tr>
               <a:tr h="460000">
                 <a:tc>
                   <a:txBody>
-                    <a:bodyPr wrap="square"/>
+                    <a:bodyPr/>
                     <a:lstStyle/>
                     <a:p>
                       <a:pPr algn="ctr"/>
@@ -4677,7 +5120,7 @@
                 </a:tc>
                 <a:tc>
                   <a:txBody>
-                    <a:bodyPr wrap="square"/>
+                    <a:bodyPr/>
                     <a:lstStyle/>
                     <a:p>
                       <a:pPr algn="ctr"/>
@@ -4688,7 +5131,7 @@
                 </a:tc>
                 <a:tc>
                   <a:txBody>
-                    <a:bodyPr wrap="square"/>
+                    <a:bodyPr/>
                     <a:lstStyle/>
                     <a:p>
                       <a:pPr algn="ctr"/>
@@ -4699,7 +5142,7 @@
                 </a:tc>
                 <a:tc>
                   <a:txBody>
-                    <a:bodyPr wrap="square"/>
+                    <a:bodyPr/>
                     <a:lstStyle/>
                     <a:p>
                       <a:pPr algn="ctr"/>
@@ -4708,11 +5151,16 @@
                   </a:txBody>
                   <a:tcPr marL="60000" marR="60000" marT="25000" marB="25000" anchor="ctr"/>
                 </a:tc>
+                <a:extLst>
+                  <a:ext uri="{0D108BD9-81ED-4DB2-BD59-A6C34878D82A}">
+                    <a16:rowId xmlns:a16="http://schemas.microsoft.com/office/drawing/2014/main" val="10002"/>
+                  </a:ext>
+                </a:extLst>
               </a:tr>
               <a:tr h="460000">
                 <a:tc>
                   <a:txBody>
-                    <a:bodyPr wrap="square"/>
+                    <a:bodyPr/>
                     <a:lstStyle/>
                     <a:p>
                       <a:pPr algn="ctr"/>
@@ -4723,7 +5171,7 @@
                 </a:tc>
                 <a:tc>
                   <a:txBody>
-                    <a:bodyPr wrap="square"/>
+                    <a:bodyPr/>
                     <a:lstStyle/>
                     <a:p>
                       <a:pPr algn="ctr"/>
@@ -4734,7 +5182,7 @@
                 </a:tc>
                 <a:tc>
                   <a:txBody>
-                    <a:bodyPr wrap="square"/>
+                    <a:bodyPr/>
                     <a:lstStyle/>
                     <a:p>
                       <a:pPr algn="ctr"/>
@@ -4745,7 +5193,7 @@
                 </a:tc>
                 <a:tc>
                   <a:txBody>
-                    <a:bodyPr wrap="square"/>
+                    <a:bodyPr/>
                     <a:lstStyle/>
                     <a:p>
                       <a:pPr algn="ctr"/>
@@ -4754,6 +5202,11 @@
                   </a:txBody>
                   <a:tcPr marL="60000" marR="60000" marT="25000" marB="25000" anchor="ctr"/>
                 </a:tc>
+                <a:extLst>
+                  <a:ext uri="{0D108BD9-81ED-4DB2-BD59-A6C34878D82A}">
+                    <a16:rowId xmlns:a16="http://schemas.microsoft.com/office/drawing/2014/main" val="10003"/>
+                  </a:ext>
+                </a:extLst>
               </a:tr>
             </a:tbl>
           </a:graphicData>
@@ -4767,8 +5220,8 @@
 </p:sld>
 </file>
 
-<file path=ppt/slides/slide11.xml><?xml version="1.0" encoding="utf-8"?>
-<p:sld xmlns:a="http://schemas.openxmlformats.org/drawingml/2006/main" xmlns:p="http://schemas.openxmlformats.org/presentationml/2006/main" xmlns:r="http://schemas.openxmlformats.org/officeDocument/2006/relationships">
+<file path=ppt/slides/slide13.xml><?xml version="1.0" encoding="utf-8"?>
+<p:sld xmlns:a="http://schemas.openxmlformats.org/drawingml/2006/main" xmlns:r="http://schemas.openxmlformats.org/officeDocument/2006/relationships" xmlns:p="http://schemas.openxmlformats.org/presentationml/2006/main">
   <p:cSld>
     <p:spTree>
       <p:nvGrpSpPr>
@@ -4776,7 +5229,14 @@
         <p:cNvGrpSpPr/>
         <p:nvPr/>
       </p:nvGrpSpPr>
-      <p:grpSpPr/>
+      <p:grpSpPr>
+        <a:xfrm>
+          <a:off x="0" y="0"/>
+          <a:ext cx="0" cy="0"/>
+          <a:chOff x="0" y="0"/>
+          <a:chExt cx="0" cy="0"/>
+        </a:xfrm>
+      </p:grpSpPr>
       <p:sp>
         <p:nvSpPr>
           <p:cNvPr id="2" name="Title 1"/>
@@ -4859,7 +5319,7 @@
           <a:noFill/>
         </p:spPr>
         <p:txBody>
-          <a:bodyPr wrap="square" lIns="36000" rIns="36000" tIns="18000" bIns="18000">
+          <a:bodyPr wrap="square" lIns="36000" tIns="18000" rIns="36000" bIns="18000">
             <a:spAutoFit/>
           </a:bodyPr>
           <a:lstStyle/>
@@ -4886,17 +5346,29 @@
         <a:graphic>
           <a:graphicData uri="http://schemas.openxmlformats.org/drawingml/2006/table">
             <a:tbl>
-              <a:tblPr firstRow="0" bandRow="0">
+              <a:tblPr>
                 <a:tableStyleId>{5940675A-B579-460E-94D1-54222C63F5DA}</a:tableStyleId>
               </a:tblPr>
               <a:tblGrid>
-                <a:gridCol w="560000"/>
-                <a:gridCol w="560000"/>
+                <a:gridCol w="560000">
+                  <a:extLst>
+                    <a:ext uri="{9D8B030D-6E8A-4147-A177-3AD203B41FA5}">
+                      <a16:colId xmlns:a16="http://schemas.microsoft.com/office/drawing/2014/main" val="20000"/>
+                    </a:ext>
+                  </a:extLst>
+                </a:gridCol>
+                <a:gridCol w="560000">
+                  <a:extLst>
+                    <a:ext uri="{9D8B030D-6E8A-4147-A177-3AD203B41FA5}">
+                      <a16:colId xmlns:a16="http://schemas.microsoft.com/office/drawing/2014/main" val="20001"/>
+                    </a:ext>
+                  </a:extLst>
+                </a:gridCol>
               </a:tblGrid>
               <a:tr h="460000">
                 <a:tc>
                   <a:txBody>
-                    <a:bodyPr wrap="square"/>
+                    <a:bodyPr/>
                     <a:lstStyle/>
                     <a:p>
                       <a:pPr algn="ctr"/>
@@ -4910,7 +5382,7 @@
                 </a:tc>
                 <a:tc>
                   <a:txBody>
-                    <a:bodyPr wrap="square"/>
+                    <a:bodyPr/>
                     <a:lstStyle/>
                     <a:p>
                       <a:pPr algn="ctr"/>
@@ -4922,11 +5394,16 @@
                   </a:txBody>
                   <a:tcPr marL="60000" marR="60000" marT="25000" marB="25000" anchor="ctr"/>
                 </a:tc>
+                <a:extLst>
+                  <a:ext uri="{0D108BD9-81ED-4DB2-BD59-A6C34878D82A}">
+                    <a16:rowId xmlns:a16="http://schemas.microsoft.com/office/drawing/2014/main" val="10000"/>
+                  </a:ext>
+                </a:extLst>
               </a:tr>
               <a:tr h="460000">
                 <a:tc>
                   <a:txBody>
-                    <a:bodyPr wrap="square"/>
+                    <a:bodyPr/>
                     <a:lstStyle/>
                     <a:p>
                       <a:pPr algn="ctr"/>
@@ -4940,7 +5417,7 @@
                 </a:tc>
                 <a:tc>
                   <a:txBody>
-                    <a:bodyPr wrap="square"/>
+                    <a:bodyPr/>
                     <a:lstStyle/>
                     <a:p>
                       <a:pPr algn="ctr"/>
@@ -4952,6 +5429,11 @@
                   </a:txBody>
                   <a:tcPr marL="60000" marR="60000" marT="25000" marB="25000" anchor="ctr"/>
                 </a:tc>
+                <a:extLst>
+                  <a:ext uri="{0D108BD9-81ED-4DB2-BD59-A6C34878D82A}">
+                    <a16:rowId xmlns:a16="http://schemas.microsoft.com/office/drawing/2014/main" val="10001"/>
+                  </a:ext>
+                </a:extLst>
               </a:tr>
             </a:tbl>
           </a:graphicData>
@@ -4974,7 +5456,7 @@
           <a:noFill/>
         </p:spPr>
         <p:txBody>
-          <a:bodyPr wrap="square" lIns="36000" rIns="36000" tIns="18000" bIns="18000">
+          <a:bodyPr wrap="square" lIns="36000" tIns="18000" rIns="36000" bIns="18000">
             <a:spAutoFit/>
           </a:bodyPr>
           <a:lstStyle/>
@@ -5003,7 +5485,7 @@
           <a:noFill/>
         </p:spPr>
         <p:txBody>
-          <a:bodyPr wrap="square" lIns="36000" rIns="36000" tIns="18000" bIns="18000">
+          <a:bodyPr wrap="square" lIns="36000" tIns="18000" rIns="36000" bIns="18000">
             <a:spAutoFit/>
           </a:bodyPr>
           <a:lstStyle/>
@@ -5030,19 +5512,43 @@
         <a:graphic>
           <a:graphicData uri="http://schemas.openxmlformats.org/drawingml/2006/table">
             <a:tbl>
-              <a:tblPr firstRow="0" bandRow="0">
+              <a:tblPr>
                 <a:tableStyleId>{5940675A-B579-460E-94D1-54222C63F5DA}</a:tableStyleId>
               </a:tblPr>
               <a:tblGrid>
-                <a:gridCol w="560000"/>
-                <a:gridCol w="560000"/>
-                <a:gridCol w="560000"/>
-                <a:gridCol w="560000"/>
+                <a:gridCol w="560000">
+                  <a:extLst>
+                    <a:ext uri="{9D8B030D-6E8A-4147-A177-3AD203B41FA5}">
+                      <a16:colId xmlns:a16="http://schemas.microsoft.com/office/drawing/2014/main" val="20000"/>
+                    </a:ext>
+                  </a:extLst>
+                </a:gridCol>
+                <a:gridCol w="560000">
+                  <a:extLst>
+                    <a:ext uri="{9D8B030D-6E8A-4147-A177-3AD203B41FA5}">
+                      <a16:colId xmlns:a16="http://schemas.microsoft.com/office/drawing/2014/main" val="20001"/>
+                    </a:ext>
+                  </a:extLst>
+                </a:gridCol>
+                <a:gridCol w="560000">
+                  <a:extLst>
+                    <a:ext uri="{9D8B030D-6E8A-4147-A177-3AD203B41FA5}">
+                      <a16:colId xmlns:a16="http://schemas.microsoft.com/office/drawing/2014/main" val="20002"/>
+                    </a:ext>
+                  </a:extLst>
+                </a:gridCol>
+                <a:gridCol w="560000">
+                  <a:extLst>
+                    <a:ext uri="{9D8B030D-6E8A-4147-A177-3AD203B41FA5}">
+                      <a16:colId xmlns:a16="http://schemas.microsoft.com/office/drawing/2014/main" val="20003"/>
+                    </a:ext>
+                  </a:extLst>
+                </a:gridCol>
               </a:tblGrid>
               <a:tr h="460000">
                 <a:tc>
                   <a:txBody>
-                    <a:bodyPr wrap="square"/>
+                    <a:bodyPr/>
                     <a:lstStyle/>
                     <a:p>
                       <a:pPr algn="ctr"/>
@@ -5060,7 +5566,7 @@
                 </a:tc>
                 <a:tc>
                   <a:txBody>
-                    <a:bodyPr wrap="square"/>
+                    <a:bodyPr/>
                     <a:lstStyle/>
                     <a:p>
                       <a:pPr algn="ctr"/>
@@ -5078,7 +5584,7 @@
                 </a:tc>
                 <a:tc>
                   <a:txBody>
-                    <a:bodyPr wrap="square"/>
+                    <a:bodyPr/>
                     <a:lstStyle/>
                     <a:p>
                       <a:pPr algn="ctr"/>
@@ -5096,7 +5602,7 @@
                 </a:tc>
                 <a:tc>
                   <a:txBody>
-                    <a:bodyPr wrap="square"/>
+                    <a:bodyPr/>
                     <a:lstStyle/>
                     <a:p>
                       <a:pPr algn="ctr"/>
@@ -5112,11 +5618,16 @@
                   </a:txBody>
                   <a:tcPr marL="60000" marR="60000" marT="25000" marB="25000" anchor="ctr"/>
                 </a:tc>
+                <a:extLst>
+                  <a:ext uri="{0D108BD9-81ED-4DB2-BD59-A6C34878D82A}">
+                    <a16:rowId xmlns:a16="http://schemas.microsoft.com/office/drawing/2014/main" val="10000"/>
+                  </a:ext>
+                </a:extLst>
               </a:tr>
               <a:tr h="460000">
                 <a:tc>
                   <a:txBody>
-                    <a:bodyPr wrap="square"/>
+                    <a:bodyPr/>
                     <a:lstStyle/>
                     <a:p>
                       <a:pPr algn="ctr"/>
@@ -5134,7 +5645,7 @@
                 </a:tc>
                 <a:tc>
                   <a:txBody>
-                    <a:bodyPr wrap="square"/>
+                    <a:bodyPr/>
                     <a:lstStyle/>
                     <a:p>
                       <a:pPr algn="ctr"/>
@@ -5152,7 +5663,7 @@
                 </a:tc>
                 <a:tc>
                   <a:txBody>
-                    <a:bodyPr wrap="square"/>
+                    <a:bodyPr/>
                     <a:lstStyle/>
                     <a:p>
                       <a:pPr algn="ctr"/>
@@ -5170,7 +5681,7 @@
                 </a:tc>
                 <a:tc>
                   <a:txBody>
-                    <a:bodyPr wrap="square"/>
+                    <a:bodyPr/>
                     <a:lstStyle/>
                     <a:p>
                       <a:pPr algn="ctr"/>
@@ -5186,11 +5697,16 @@
                   </a:txBody>
                   <a:tcPr marL="60000" marR="60000" marT="25000" marB="25000" anchor="ctr"/>
                 </a:tc>
+                <a:extLst>
+                  <a:ext uri="{0D108BD9-81ED-4DB2-BD59-A6C34878D82A}">
+                    <a16:rowId xmlns:a16="http://schemas.microsoft.com/office/drawing/2014/main" val="10001"/>
+                  </a:ext>
+                </a:extLst>
               </a:tr>
               <a:tr h="460000">
                 <a:tc>
                   <a:txBody>
-                    <a:bodyPr wrap="square"/>
+                    <a:bodyPr/>
                     <a:lstStyle/>
                     <a:p>
                       <a:pPr algn="ctr"/>
@@ -5208,7 +5724,7 @@
                 </a:tc>
                 <a:tc>
                   <a:txBody>
-                    <a:bodyPr wrap="square"/>
+                    <a:bodyPr/>
                     <a:lstStyle/>
                     <a:p>
                       <a:pPr algn="ctr"/>
@@ -5226,7 +5742,7 @@
                 </a:tc>
                 <a:tc>
                   <a:txBody>
-                    <a:bodyPr wrap="square"/>
+                    <a:bodyPr/>
                     <a:lstStyle/>
                     <a:p>
                       <a:pPr algn="ctr"/>
@@ -5244,7 +5760,7 @@
                 </a:tc>
                 <a:tc>
                   <a:txBody>
-                    <a:bodyPr wrap="square"/>
+                    <a:bodyPr/>
                     <a:lstStyle/>
                     <a:p>
                       <a:pPr algn="ctr"/>
@@ -5260,11 +5776,16 @@
                   </a:txBody>
                   <a:tcPr marL="60000" marR="60000" marT="25000" marB="25000" anchor="ctr"/>
                 </a:tc>
+                <a:extLst>
+                  <a:ext uri="{0D108BD9-81ED-4DB2-BD59-A6C34878D82A}">
+                    <a16:rowId xmlns:a16="http://schemas.microsoft.com/office/drawing/2014/main" val="10002"/>
+                  </a:ext>
+                </a:extLst>
               </a:tr>
               <a:tr h="460000">
                 <a:tc>
                   <a:txBody>
-                    <a:bodyPr wrap="square"/>
+                    <a:bodyPr/>
                     <a:lstStyle/>
                     <a:p>
                       <a:pPr algn="ctr"/>
@@ -5282,7 +5803,7 @@
                 </a:tc>
                 <a:tc>
                   <a:txBody>
-                    <a:bodyPr wrap="square"/>
+                    <a:bodyPr/>
                     <a:lstStyle/>
                     <a:p>
                       <a:pPr algn="ctr"/>
@@ -5300,7 +5821,7 @@
                 </a:tc>
                 <a:tc>
                   <a:txBody>
-                    <a:bodyPr wrap="square"/>
+                    <a:bodyPr/>
                     <a:lstStyle/>
                     <a:p>
                       <a:pPr algn="ctr"/>
@@ -5318,7 +5839,7 @@
                 </a:tc>
                 <a:tc>
                   <a:txBody>
-                    <a:bodyPr wrap="square"/>
+                    <a:bodyPr/>
                     <a:lstStyle/>
                     <a:p>
                       <a:pPr algn="ctr"/>
@@ -5334,6 +5855,11 @@
                   </a:txBody>
                   <a:tcPr marL="60000" marR="60000" marT="25000" marB="25000" anchor="ctr"/>
                 </a:tc>
+                <a:extLst>
+                  <a:ext uri="{0D108BD9-81ED-4DB2-BD59-A6C34878D82A}">
+                    <a16:rowId xmlns:a16="http://schemas.microsoft.com/office/drawing/2014/main" val="10003"/>
+                  </a:ext>
+                </a:extLst>
               </a:tr>
             </a:tbl>
           </a:graphicData>
@@ -5354,19 +5880,43 @@
         <a:graphic>
           <a:graphicData uri="http://schemas.openxmlformats.org/drawingml/2006/table">
             <a:tbl>
-              <a:tblPr firstRow="0" bandRow="0">
+              <a:tblPr>
                 <a:tableStyleId>{5940675A-B579-460E-94D1-54222C63F5DA}</a:tableStyleId>
               </a:tblPr>
               <a:tblGrid>
-                <a:gridCol w="560000"/>
-                <a:gridCol w="560000"/>
-                <a:gridCol w="560000"/>
-                <a:gridCol w="560000"/>
+                <a:gridCol w="560000">
+                  <a:extLst>
+                    <a:ext uri="{9D8B030D-6E8A-4147-A177-3AD203B41FA5}">
+                      <a16:colId xmlns:a16="http://schemas.microsoft.com/office/drawing/2014/main" val="20000"/>
+                    </a:ext>
+                  </a:extLst>
+                </a:gridCol>
+                <a:gridCol w="560000">
+                  <a:extLst>
+                    <a:ext uri="{9D8B030D-6E8A-4147-A177-3AD203B41FA5}">
+                      <a16:colId xmlns:a16="http://schemas.microsoft.com/office/drawing/2014/main" val="20001"/>
+                    </a:ext>
+                  </a:extLst>
+                </a:gridCol>
+                <a:gridCol w="560000">
+                  <a:extLst>
+                    <a:ext uri="{9D8B030D-6E8A-4147-A177-3AD203B41FA5}">
+                      <a16:colId xmlns:a16="http://schemas.microsoft.com/office/drawing/2014/main" val="20002"/>
+                    </a:ext>
+                  </a:extLst>
+                </a:gridCol>
+                <a:gridCol w="560000">
+                  <a:extLst>
+                    <a:ext uri="{9D8B030D-6E8A-4147-A177-3AD203B41FA5}">
+                      <a16:colId xmlns:a16="http://schemas.microsoft.com/office/drawing/2014/main" val="20003"/>
+                    </a:ext>
+                  </a:extLst>
+                </a:gridCol>
               </a:tblGrid>
               <a:tr h="460000">
                 <a:tc>
                   <a:txBody>
-                    <a:bodyPr wrap="square"/>
+                    <a:bodyPr/>
                     <a:lstStyle/>
                     <a:p>
                       <a:pPr algn="ctr"/>
@@ -5384,7 +5934,7 @@
                 </a:tc>
                 <a:tc>
                   <a:txBody>
-                    <a:bodyPr wrap="square"/>
+                    <a:bodyPr/>
                     <a:lstStyle/>
                     <a:p>
                       <a:pPr algn="ctr"/>
@@ -5402,7 +5952,7 @@
                 </a:tc>
                 <a:tc>
                   <a:txBody>
-                    <a:bodyPr wrap="square"/>
+                    <a:bodyPr/>
                     <a:lstStyle/>
                     <a:p>
                       <a:pPr algn="ctr"/>
@@ -5420,7 +5970,7 @@
                 </a:tc>
                 <a:tc>
                   <a:txBody>
-                    <a:bodyPr wrap="square"/>
+                    <a:bodyPr/>
                     <a:lstStyle/>
                     <a:p>
                       <a:pPr algn="ctr"/>
@@ -5436,11 +5986,16 @@
                   </a:txBody>
                   <a:tcPr marL="60000" marR="60000" marT="25000" marB="25000" anchor="ctr"/>
                 </a:tc>
+                <a:extLst>
+                  <a:ext uri="{0D108BD9-81ED-4DB2-BD59-A6C34878D82A}">
+                    <a16:rowId xmlns:a16="http://schemas.microsoft.com/office/drawing/2014/main" val="10000"/>
+                  </a:ext>
+                </a:extLst>
               </a:tr>
               <a:tr h="460000">
                 <a:tc>
                   <a:txBody>
-                    <a:bodyPr wrap="square"/>
+                    <a:bodyPr/>
                     <a:lstStyle/>
                     <a:p>
                       <a:pPr algn="ctr"/>
@@ -5458,7 +6013,7 @@
                 </a:tc>
                 <a:tc>
                   <a:txBody>
-                    <a:bodyPr wrap="square"/>
+                    <a:bodyPr/>
                     <a:lstStyle/>
                     <a:p>
                       <a:pPr algn="ctr"/>
@@ -5476,7 +6031,7 @@
                 </a:tc>
                 <a:tc>
                   <a:txBody>
-                    <a:bodyPr wrap="square"/>
+                    <a:bodyPr/>
                     <a:lstStyle/>
                     <a:p>
                       <a:pPr algn="ctr"/>
@@ -5494,7 +6049,7 @@
                 </a:tc>
                 <a:tc>
                   <a:txBody>
-                    <a:bodyPr wrap="square"/>
+                    <a:bodyPr/>
                     <a:lstStyle/>
                     <a:p>
                       <a:pPr algn="ctr"/>
@@ -5510,11 +6065,16 @@
                   </a:txBody>
                   <a:tcPr marL="60000" marR="60000" marT="25000" marB="25000" anchor="ctr"/>
                 </a:tc>
+                <a:extLst>
+                  <a:ext uri="{0D108BD9-81ED-4DB2-BD59-A6C34878D82A}">
+                    <a16:rowId xmlns:a16="http://schemas.microsoft.com/office/drawing/2014/main" val="10001"/>
+                  </a:ext>
+                </a:extLst>
               </a:tr>
               <a:tr h="460000">
                 <a:tc>
                   <a:txBody>
-                    <a:bodyPr wrap="square"/>
+                    <a:bodyPr/>
                     <a:lstStyle/>
                     <a:p>
                       <a:pPr algn="ctr"/>
@@ -5532,7 +6092,7 @@
                 </a:tc>
                 <a:tc>
                   <a:txBody>
-                    <a:bodyPr wrap="square"/>
+                    <a:bodyPr/>
                     <a:lstStyle/>
                     <a:p>
                       <a:pPr algn="ctr"/>
@@ -5550,7 +6110,7 @@
                 </a:tc>
                 <a:tc>
                   <a:txBody>
-                    <a:bodyPr wrap="square"/>
+                    <a:bodyPr/>
                     <a:lstStyle/>
                     <a:p>
                       <a:pPr algn="ctr"/>
@@ -5568,7 +6128,7 @@
                 </a:tc>
                 <a:tc>
                   <a:txBody>
-                    <a:bodyPr wrap="square"/>
+                    <a:bodyPr/>
                     <a:lstStyle/>
                     <a:p>
                       <a:pPr algn="ctr"/>
@@ -5584,11 +6144,16 @@
                   </a:txBody>
                   <a:tcPr marL="60000" marR="60000" marT="25000" marB="25000" anchor="ctr"/>
                 </a:tc>
+                <a:extLst>
+                  <a:ext uri="{0D108BD9-81ED-4DB2-BD59-A6C34878D82A}">
+                    <a16:rowId xmlns:a16="http://schemas.microsoft.com/office/drawing/2014/main" val="10002"/>
+                  </a:ext>
+                </a:extLst>
               </a:tr>
               <a:tr h="460000">
                 <a:tc>
                   <a:txBody>
-                    <a:bodyPr wrap="square"/>
+                    <a:bodyPr/>
                     <a:lstStyle/>
                     <a:p>
                       <a:pPr algn="ctr"/>
@@ -5606,7 +6171,7 @@
                 </a:tc>
                 <a:tc>
                   <a:txBody>
-                    <a:bodyPr wrap="square"/>
+                    <a:bodyPr/>
                     <a:lstStyle/>
                     <a:p>
                       <a:pPr algn="ctr"/>
@@ -5624,7 +6189,7 @@
                 </a:tc>
                 <a:tc>
                   <a:txBody>
-                    <a:bodyPr wrap="square"/>
+                    <a:bodyPr/>
                     <a:lstStyle/>
                     <a:p>
                       <a:pPr algn="ctr"/>
@@ -5642,7 +6207,7 @@
                 </a:tc>
                 <a:tc>
                   <a:txBody>
-                    <a:bodyPr wrap="square"/>
+                    <a:bodyPr/>
                     <a:lstStyle/>
                     <a:p>
                       <a:pPr algn="ctr"/>
@@ -5658,6 +6223,11 @@
                   </a:txBody>
                   <a:tcPr marL="60000" marR="60000" marT="25000" marB="25000" anchor="ctr"/>
                 </a:tc>
+                <a:extLst>
+                  <a:ext uri="{0D108BD9-81ED-4DB2-BD59-A6C34878D82A}">
+                    <a16:rowId xmlns:a16="http://schemas.microsoft.com/office/drawing/2014/main" val="10003"/>
+                  </a:ext>
+                </a:extLst>
               </a:tr>
             </a:tbl>
           </a:graphicData>
@@ -5671,8 +6241,8 @@
 </p:sld>
 </file>
 
-<file path=ppt/slides/slide12.xml><?xml version="1.0" encoding="utf-8"?>
-<p:sld xmlns:a="http://schemas.openxmlformats.org/drawingml/2006/main" xmlns:p="http://schemas.openxmlformats.org/presentationml/2006/main" xmlns:r="http://schemas.openxmlformats.org/officeDocument/2006/relationships">
+<file path=ppt/slides/slide14.xml><?xml version="1.0" encoding="utf-8"?>
+<p:sld xmlns:a="http://schemas.openxmlformats.org/drawingml/2006/main" xmlns:r="http://schemas.openxmlformats.org/officeDocument/2006/relationships" xmlns:p="http://schemas.openxmlformats.org/presentationml/2006/main">
   <p:cSld>
     <p:spTree>
       <p:nvGrpSpPr>
@@ -5680,7 +6250,14 @@
         <p:cNvGrpSpPr/>
         <p:nvPr/>
       </p:nvGrpSpPr>
-      <p:grpSpPr/>
+      <p:grpSpPr>
+        <a:xfrm>
+          <a:off x="0" y="0"/>
+          <a:ext cx="0" cy="0"/>
+          <a:chOff x="0" y="0"/>
+          <a:chExt cx="0" cy="0"/>
+        </a:xfrm>
+      </p:grpSpPr>
       <p:sp>
         <p:nvSpPr>
           <p:cNvPr id="2" name="Title 1"/>
@@ -5789,7 +6366,7 @@
           <a:noFill/>
         </p:spPr>
         <p:txBody>
-          <a:bodyPr wrap="square" lIns="36000" rIns="36000" tIns="18000" bIns="18000">
+          <a:bodyPr wrap="square" lIns="36000" tIns="18000" rIns="36000" bIns="18000">
             <a:spAutoFit/>
           </a:bodyPr>
           <a:lstStyle/>
@@ -5816,17 +6393,29 @@
         <a:graphic>
           <a:graphicData uri="http://schemas.openxmlformats.org/drawingml/2006/table">
             <a:tbl>
-              <a:tblPr firstRow="0" bandRow="0">
+              <a:tblPr>
                 <a:tableStyleId>{5940675A-B579-460E-94D1-54222C63F5DA}</a:tableStyleId>
               </a:tblPr>
               <a:tblGrid>
-                <a:gridCol w="560000"/>
-                <a:gridCol w="560000"/>
+                <a:gridCol w="560000">
+                  <a:extLst>
+                    <a:ext uri="{9D8B030D-6E8A-4147-A177-3AD203B41FA5}">
+                      <a16:colId xmlns:a16="http://schemas.microsoft.com/office/drawing/2014/main" val="20000"/>
+                    </a:ext>
+                  </a:extLst>
+                </a:gridCol>
+                <a:gridCol w="560000">
+                  <a:extLst>
+                    <a:ext uri="{9D8B030D-6E8A-4147-A177-3AD203B41FA5}">
+                      <a16:colId xmlns:a16="http://schemas.microsoft.com/office/drawing/2014/main" val="20001"/>
+                    </a:ext>
+                  </a:extLst>
+                </a:gridCol>
               </a:tblGrid>
               <a:tr h="460000">
                 <a:tc>
                   <a:txBody>
-                    <a:bodyPr wrap="square"/>
+                    <a:bodyPr/>
                     <a:lstStyle/>
                     <a:p>
                       <a:pPr algn="ctr"/>
@@ -5840,7 +6429,7 @@
                 </a:tc>
                 <a:tc>
                   <a:txBody>
-                    <a:bodyPr wrap="square"/>
+                    <a:bodyPr/>
                     <a:lstStyle/>
                     <a:p>
                       <a:pPr algn="ctr"/>
@@ -5852,11 +6441,16 @@
                   </a:txBody>
                   <a:tcPr marL="60000" marR="60000" marT="25000" marB="25000" anchor="ctr"/>
                 </a:tc>
+                <a:extLst>
+                  <a:ext uri="{0D108BD9-81ED-4DB2-BD59-A6C34878D82A}">
+                    <a16:rowId xmlns:a16="http://schemas.microsoft.com/office/drawing/2014/main" val="10000"/>
+                  </a:ext>
+                </a:extLst>
               </a:tr>
               <a:tr h="460000">
                 <a:tc>
                   <a:txBody>
-                    <a:bodyPr wrap="square"/>
+                    <a:bodyPr/>
                     <a:lstStyle/>
                     <a:p>
                       <a:pPr algn="ctr"/>
@@ -5870,7 +6464,7 @@
                 </a:tc>
                 <a:tc>
                   <a:txBody>
-                    <a:bodyPr wrap="square"/>
+                    <a:bodyPr/>
                     <a:lstStyle/>
                     <a:p>
                       <a:pPr algn="ctr"/>
@@ -5882,6 +6476,11 @@
                   </a:txBody>
                   <a:tcPr marL="60000" marR="60000" marT="25000" marB="25000" anchor="ctr"/>
                 </a:tc>
+                <a:extLst>
+                  <a:ext uri="{0D108BD9-81ED-4DB2-BD59-A6C34878D82A}">
+                    <a16:rowId xmlns:a16="http://schemas.microsoft.com/office/drawing/2014/main" val="10001"/>
+                  </a:ext>
+                </a:extLst>
               </a:tr>
             </a:tbl>
           </a:graphicData>
@@ -5904,7 +6503,7 @@
           <a:noFill/>
         </p:spPr>
         <p:txBody>
-          <a:bodyPr wrap="square" lIns="36000" rIns="36000" tIns="18000" bIns="18000">
+          <a:bodyPr wrap="square" lIns="36000" tIns="18000" rIns="36000" bIns="18000">
             <a:spAutoFit/>
           </a:bodyPr>
           <a:lstStyle/>
@@ -5931,17 +6530,29 @@
         <a:graphic>
           <a:graphicData uri="http://schemas.openxmlformats.org/drawingml/2006/table">
             <a:tbl>
-              <a:tblPr firstRow="0" bandRow="0">
+              <a:tblPr>
                 <a:tableStyleId>{5940675A-B579-460E-94D1-54222C63F5DA}</a:tableStyleId>
               </a:tblPr>
               <a:tblGrid>
-                <a:gridCol w="560000"/>
-                <a:gridCol w="560000"/>
+                <a:gridCol w="560000">
+                  <a:extLst>
+                    <a:ext uri="{9D8B030D-6E8A-4147-A177-3AD203B41FA5}">
+                      <a16:colId xmlns:a16="http://schemas.microsoft.com/office/drawing/2014/main" val="20000"/>
+                    </a:ext>
+                  </a:extLst>
+                </a:gridCol>
+                <a:gridCol w="560000">
+                  <a:extLst>
+                    <a:ext uri="{9D8B030D-6E8A-4147-A177-3AD203B41FA5}">
+                      <a16:colId xmlns:a16="http://schemas.microsoft.com/office/drawing/2014/main" val="20001"/>
+                    </a:ext>
+                  </a:extLst>
+                </a:gridCol>
               </a:tblGrid>
               <a:tr h="460000">
                 <a:tc>
                   <a:txBody>
-                    <a:bodyPr wrap="square"/>
+                    <a:bodyPr/>
                     <a:lstStyle/>
                     <a:p>
                       <a:pPr algn="ctr"/>
@@ -5955,7 +6566,7 @@
                 </a:tc>
                 <a:tc>
                   <a:txBody>
-                    <a:bodyPr wrap="square"/>
+                    <a:bodyPr/>
                     <a:lstStyle/>
                     <a:p>
                       <a:pPr algn="ctr"/>
@@ -5967,11 +6578,16 @@
                   </a:txBody>
                   <a:tcPr marL="60000" marR="60000" marT="25000" marB="25000" anchor="ctr"/>
                 </a:tc>
+                <a:extLst>
+                  <a:ext uri="{0D108BD9-81ED-4DB2-BD59-A6C34878D82A}">
+                    <a16:rowId xmlns:a16="http://schemas.microsoft.com/office/drawing/2014/main" val="10000"/>
+                  </a:ext>
+                </a:extLst>
               </a:tr>
               <a:tr h="460000">
                 <a:tc>
                   <a:txBody>
-                    <a:bodyPr wrap="square"/>
+                    <a:bodyPr/>
                     <a:lstStyle/>
                     <a:p>
                       <a:pPr algn="ctr"/>
@@ -5985,7 +6601,7 @@
                 </a:tc>
                 <a:tc>
                   <a:txBody>
-                    <a:bodyPr wrap="square"/>
+                    <a:bodyPr/>
                     <a:lstStyle/>
                     <a:p>
                       <a:pPr algn="ctr"/>
@@ -5997,6 +6613,11 @@
                   </a:txBody>
                   <a:tcPr marL="60000" marR="60000" marT="25000" marB="25000" anchor="ctr"/>
                 </a:tc>
+                <a:extLst>
+                  <a:ext uri="{0D108BD9-81ED-4DB2-BD59-A6C34878D82A}">
+                    <a16:rowId xmlns:a16="http://schemas.microsoft.com/office/drawing/2014/main" val="10001"/>
+                  </a:ext>
+                </a:extLst>
               </a:tr>
             </a:tbl>
           </a:graphicData>
@@ -6019,7 +6640,7 @@
           <a:noFill/>
         </p:spPr>
         <p:txBody>
-          <a:bodyPr wrap="square" lIns="36000" rIns="36000" tIns="18000" bIns="18000">
+          <a:bodyPr wrap="square" lIns="36000" tIns="18000" rIns="36000" bIns="18000">
             <a:spAutoFit/>
           </a:bodyPr>
           <a:lstStyle/>
@@ -6046,18 +6667,36 @@
         <a:graphic>
           <a:graphicData uri="http://schemas.openxmlformats.org/drawingml/2006/table">
             <a:tbl>
-              <a:tblPr firstRow="0" bandRow="0">
+              <a:tblPr>
                 <a:tableStyleId>{5940675A-B579-460E-94D1-54222C63F5DA}</a:tableStyleId>
               </a:tblPr>
               <a:tblGrid>
-                <a:gridCol w="560000"/>
-                <a:gridCol w="560000"/>
-                <a:gridCol w="560000"/>
+                <a:gridCol w="560000">
+                  <a:extLst>
+                    <a:ext uri="{9D8B030D-6E8A-4147-A177-3AD203B41FA5}">
+                      <a16:colId xmlns:a16="http://schemas.microsoft.com/office/drawing/2014/main" val="20000"/>
+                    </a:ext>
+                  </a:extLst>
+                </a:gridCol>
+                <a:gridCol w="560000">
+                  <a:extLst>
+                    <a:ext uri="{9D8B030D-6E8A-4147-A177-3AD203B41FA5}">
+                      <a16:colId xmlns:a16="http://schemas.microsoft.com/office/drawing/2014/main" val="20001"/>
+                    </a:ext>
+                  </a:extLst>
+                </a:gridCol>
+                <a:gridCol w="560000">
+                  <a:extLst>
+                    <a:ext uri="{9D8B030D-6E8A-4147-A177-3AD203B41FA5}">
+                      <a16:colId xmlns:a16="http://schemas.microsoft.com/office/drawing/2014/main" val="20002"/>
+                    </a:ext>
+                  </a:extLst>
+                </a:gridCol>
               </a:tblGrid>
               <a:tr h="460000">
                 <a:tc>
                   <a:txBody>
-                    <a:bodyPr wrap="square"/>
+                    <a:bodyPr/>
                     <a:lstStyle/>
                     <a:p>
                       <a:pPr algn="ctr"/>
@@ -6068,7 +6707,7 @@
                 </a:tc>
                 <a:tc>
                   <a:txBody>
-                    <a:bodyPr wrap="square"/>
+                    <a:bodyPr/>
                     <a:lstStyle/>
                     <a:p>
                       <a:pPr algn="ctr"/>
@@ -6079,7 +6718,7 @@
                 </a:tc>
                 <a:tc>
                   <a:txBody>
-                    <a:bodyPr wrap="square"/>
+                    <a:bodyPr/>
                     <a:lstStyle/>
                     <a:p>
                       <a:pPr algn="ctr"/>
@@ -6088,11 +6727,16 @@
                   </a:txBody>
                   <a:tcPr marL="60000" marR="60000" marT="25000" marB="25000" anchor="ctr"/>
                 </a:tc>
+                <a:extLst>
+                  <a:ext uri="{0D108BD9-81ED-4DB2-BD59-A6C34878D82A}">
+                    <a16:rowId xmlns:a16="http://schemas.microsoft.com/office/drawing/2014/main" val="10000"/>
+                  </a:ext>
+                </a:extLst>
               </a:tr>
               <a:tr h="460000">
                 <a:tc>
                   <a:txBody>
-                    <a:bodyPr wrap="square"/>
+                    <a:bodyPr/>
                     <a:lstStyle/>
                     <a:p>
                       <a:pPr algn="ctr"/>
@@ -6103,7 +6747,7 @@
                 </a:tc>
                 <a:tc>
                   <a:txBody>
-                    <a:bodyPr wrap="square"/>
+                    <a:bodyPr/>
                     <a:lstStyle/>
                     <a:p>
                       <a:pPr algn="ctr"/>
@@ -6114,7 +6758,7 @@
                 </a:tc>
                 <a:tc>
                   <a:txBody>
-                    <a:bodyPr wrap="square"/>
+                    <a:bodyPr/>
                     <a:lstStyle/>
                     <a:p>
                       <a:pPr algn="ctr"/>
@@ -6123,11 +6767,16 @@
                   </a:txBody>
                   <a:tcPr marL="60000" marR="60000" marT="25000" marB="25000" anchor="ctr"/>
                 </a:tc>
+                <a:extLst>
+                  <a:ext uri="{0D108BD9-81ED-4DB2-BD59-A6C34878D82A}">
+                    <a16:rowId xmlns:a16="http://schemas.microsoft.com/office/drawing/2014/main" val="10001"/>
+                  </a:ext>
+                </a:extLst>
               </a:tr>
               <a:tr h="460000">
                 <a:tc>
                   <a:txBody>
-                    <a:bodyPr wrap="square"/>
+                    <a:bodyPr/>
                     <a:lstStyle/>
                     <a:p>
                       <a:pPr algn="ctr"/>
@@ -6138,7 +6787,7 @@
                 </a:tc>
                 <a:tc>
                   <a:txBody>
-                    <a:bodyPr wrap="square"/>
+                    <a:bodyPr/>
                     <a:lstStyle/>
                     <a:p>
                       <a:pPr algn="ctr"/>
@@ -6149,7 +6798,7 @@
                 </a:tc>
                 <a:tc>
                   <a:txBody>
-                    <a:bodyPr wrap="square"/>
+                    <a:bodyPr/>
                     <a:lstStyle/>
                     <a:p>
                       <a:pPr algn="ctr"/>
@@ -6158,6 +6807,11 @@
                   </a:txBody>
                   <a:tcPr marL="60000" marR="60000" marT="25000" marB="25000" anchor="ctr"/>
                 </a:tc>
+                <a:extLst>
+                  <a:ext uri="{0D108BD9-81ED-4DB2-BD59-A6C34878D82A}">
+                    <a16:rowId xmlns:a16="http://schemas.microsoft.com/office/drawing/2014/main" val="10002"/>
+                  </a:ext>
+                </a:extLst>
               </a:tr>
             </a:tbl>
           </a:graphicData>
@@ -6171,8 +6825,8 @@
 </p:sld>
 </file>
 
-<file path=ppt/slides/slide13.xml><?xml version="1.0" encoding="utf-8"?>
-<p:sld xmlns:a="http://schemas.openxmlformats.org/drawingml/2006/main" xmlns:p="http://schemas.openxmlformats.org/presentationml/2006/main" xmlns:r="http://schemas.openxmlformats.org/officeDocument/2006/relationships">
+<file path=ppt/slides/slide15.xml><?xml version="1.0" encoding="utf-8"?>
+<p:sld xmlns:a="http://schemas.openxmlformats.org/drawingml/2006/main" xmlns:r="http://schemas.openxmlformats.org/officeDocument/2006/relationships" xmlns:p="http://schemas.openxmlformats.org/presentationml/2006/main">
   <p:cSld>
     <p:spTree>
       <p:nvGrpSpPr>
@@ -6180,7 +6834,14 @@
         <p:cNvGrpSpPr/>
         <p:nvPr/>
       </p:nvGrpSpPr>
-      <p:grpSpPr/>
+      <p:grpSpPr>
+        <a:xfrm>
+          <a:off x="0" y="0"/>
+          <a:ext cx="0" cy="0"/>
+          <a:chOff x="0" y="0"/>
+          <a:chExt cx="0" cy="0"/>
+        </a:xfrm>
+      </p:grpSpPr>
       <p:sp>
         <p:nvSpPr>
           <p:cNvPr id="2" name="Title 1"/>
@@ -6299,7 +6960,7 @@
           <a:noFill/>
         </p:spPr>
         <p:txBody>
-          <a:bodyPr wrap="square" lIns="36000" rIns="36000" tIns="18000" bIns="18000">
+          <a:bodyPr wrap="square" lIns="36000" tIns="18000" rIns="36000" bIns="18000">
             <a:spAutoFit/>
           </a:bodyPr>
           <a:lstStyle/>
@@ -6326,17 +6987,29 @@
         <a:graphic>
           <a:graphicData uri="http://schemas.openxmlformats.org/drawingml/2006/table">
             <a:tbl>
-              <a:tblPr firstRow="0" bandRow="0">
+              <a:tblPr>
                 <a:tableStyleId>{5940675A-B579-460E-94D1-54222C63F5DA}</a:tableStyleId>
               </a:tblPr>
               <a:tblGrid>
-                <a:gridCol w="560000"/>
-                <a:gridCol w="560000"/>
+                <a:gridCol w="560000">
+                  <a:extLst>
+                    <a:ext uri="{9D8B030D-6E8A-4147-A177-3AD203B41FA5}">
+                      <a16:colId xmlns:a16="http://schemas.microsoft.com/office/drawing/2014/main" val="20000"/>
+                    </a:ext>
+                  </a:extLst>
+                </a:gridCol>
+                <a:gridCol w="560000">
+                  <a:extLst>
+                    <a:ext uri="{9D8B030D-6E8A-4147-A177-3AD203B41FA5}">
+                      <a16:colId xmlns:a16="http://schemas.microsoft.com/office/drawing/2014/main" val="20001"/>
+                    </a:ext>
+                  </a:extLst>
+                </a:gridCol>
               </a:tblGrid>
               <a:tr h="460000">
                 <a:tc>
                   <a:txBody>
-                    <a:bodyPr wrap="square"/>
+                    <a:bodyPr/>
                     <a:lstStyle/>
                     <a:p>
                       <a:pPr algn="ctr"/>
@@ -6350,7 +7023,7 @@
                 </a:tc>
                 <a:tc>
                   <a:txBody>
-                    <a:bodyPr wrap="square"/>
+                    <a:bodyPr/>
                     <a:lstStyle/>
                     <a:p>
                       <a:pPr algn="ctr"/>
@@ -6362,11 +7035,16 @@
                   </a:txBody>
                   <a:tcPr marL="60000" marR="60000" marT="25000" marB="25000" anchor="ctr"/>
                 </a:tc>
+                <a:extLst>
+                  <a:ext uri="{0D108BD9-81ED-4DB2-BD59-A6C34878D82A}">
+                    <a16:rowId xmlns:a16="http://schemas.microsoft.com/office/drawing/2014/main" val="10000"/>
+                  </a:ext>
+                </a:extLst>
               </a:tr>
               <a:tr h="460000">
                 <a:tc>
                   <a:txBody>
-                    <a:bodyPr wrap="square"/>
+                    <a:bodyPr/>
                     <a:lstStyle/>
                     <a:p>
                       <a:pPr algn="ctr"/>
@@ -6380,7 +7058,7 @@
                 </a:tc>
                 <a:tc>
                   <a:txBody>
-                    <a:bodyPr wrap="square"/>
+                    <a:bodyPr/>
                     <a:lstStyle/>
                     <a:p>
                       <a:pPr algn="ctr"/>
@@ -6392,6 +7070,11 @@
                   </a:txBody>
                   <a:tcPr marL="60000" marR="60000" marT="25000" marB="25000" anchor="ctr"/>
                 </a:tc>
+                <a:extLst>
+                  <a:ext uri="{0D108BD9-81ED-4DB2-BD59-A6C34878D82A}">
+                    <a16:rowId xmlns:a16="http://schemas.microsoft.com/office/drawing/2014/main" val="10001"/>
+                  </a:ext>
+                </a:extLst>
               </a:tr>
             </a:tbl>
           </a:graphicData>
@@ -6414,7 +7097,7 @@
           <a:noFill/>
         </p:spPr>
         <p:txBody>
-          <a:bodyPr wrap="square" lIns="36000" rIns="36000" tIns="18000" bIns="18000">
+          <a:bodyPr wrap="square" lIns="36000" tIns="18000" rIns="36000" bIns="18000">
             <a:spAutoFit/>
           </a:bodyPr>
           <a:lstStyle/>
@@ -6441,17 +7124,29 @@
         <a:graphic>
           <a:graphicData uri="http://schemas.openxmlformats.org/drawingml/2006/table">
             <a:tbl>
-              <a:tblPr firstRow="0" bandRow="0">
+              <a:tblPr>
                 <a:tableStyleId>{5940675A-B579-460E-94D1-54222C63F5DA}</a:tableStyleId>
               </a:tblPr>
               <a:tblGrid>
-                <a:gridCol w="560000"/>
-                <a:gridCol w="560000"/>
+                <a:gridCol w="560000">
+                  <a:extLst>
+                    <a:ext uri="{9D8B030D-6E8A-4147-A177-3AD203B41FA5}">
+                      <a16:colId xmlns:a16="http://schemas.microsoft.com/office/drawing/2014/main" val="20000"/>
+                    </a:ext>
+                  </a:extLst>
+                </a:gridCol>
+                <a:gridCol w="560000">
+                  <a:extLst>
+                    <a:ext uri="{9D8B030D-6E8A-4147-A177-3AD203B41FA5}">
+                      <a16:colId xmlns:a16="http://schemas.microsoft.com/office/drawing/2014/main" val="20001"/>
+                    </a:ext>
+                  </a:extLst>
+                </a:gridCol>
               </a:tblGrid>
               <a:tr h="460000">
                 <a:tc>
                   <a:txBody>
-                    <a:bodyPr wrap="square"/>
+                    <a:bodyPr/>
                     <a:lstStyle/>
                     <a:p>
                       <a:pPr algn="ctr"/>
@@ -6465,7 +7160,7 @@
                 </a:tc>
                 <a:tc>
                   <a:txBody>
-                    <a:bodyPr wrap="square"/>
+                    <a:bodyPr/>
                     <a:lstStyle/>
                     <a:p>
                       <a:pPr algn="ctr"/>
@@ -6477,11 +7172,16 @@
                   </a:txBody>
                   <a:tcPr marL="60000" marR="60000" marT="25000" marB="25000" anchor="ctr"/>
                 </a:tc>
+                <a:extLst>
+                  <a:ext uri="{0D108BD9-81ED-4DB2-BD59-A6C34878D82A}">
+                    <a16:rowId xmlns:a16="http://schemas.microsoft.com/office/drawing/2014/main" val="10000"/>
+                  </a:ext>
+                </a:extLst>
               </a:tr>
               <a:tr h="460000">
                 <a:tc>
                   <a:txBody>
-                    <a:bodyPr wrap="square"/>
+                    <a:bodyPr/>
                     <a:lstStyle/>
                     <a:p>
                       <a:pPr algn="ctr"/>
@@ -6495,7 +7195,7 @@
                 </a:tc>
                 <a:tc>
                   <a:txBody>
-                    <a:bodyPr wrap="square"/>
+                    <a:bodyPr/>
                     <a:lstStyle/>
                     <a:p>
                       <a:pPr algn="ctr"/>
@@ -6507,6 +7207,11 @@
                   </a:txBody>
                   <a:tcPr marL="60000" marR="60000" marT="25000" marB="25000" anchor="ctr"/>
                 </a:tc>
+                <a:extLst>
+                  <a:ext uri="{0D108BD9-81ED-4DB2-BD59-A6C34878D82A}">
+                    <a16:rowId xmlns:a16="http://schemas.microsoft.com/office/drawing/2014/main" val="10001"/>
+                  </a:ext>
+                </a:extLst>
               </a:tr>
             </a:tbl>
           </a:graphicData>
@@ -6529,7 +7234,7 @@
           <a:noFill/>
         </p:spPr>
         <p:txBody>
-          <a:bodyPr wrap="square" lIns="36000" rIns="36000" tIns="18000" bIns="18000">
+          <a:bodyPr wrap="square" lIns="36000" tIns="18000" rIns="36000" bIns="18000">
             <a:spAutoFit/>
           </a:bodyPr>
           <a:lstStyle/>
@@ -6556,18 +7261,36 @@
         <a:graphic>
           <a:graphicData uri="http://schemas.openxmlformats.org/drawingml/2006/table">
             <a:tbl>
-              <a:tblPr firstRow="0" bandRow="0">
+              <a:tblPr>
                 <a:tableStyleId>{5940675A-B579-460E-94D1-54222C63F5DA}</a:tableStyleId>
               </a:tblPr>
               <a:tblGrid>
-                <a:gridCol w="560000"/>
-                <a:gridCol w="560000"/>
-                <a:gridCol w="560000"/>
+                <a:gridCol w="560000">
+                  <a:extLst>
+                    <a:ext uri="{9D8B030D-6E8A-4147-A177-3AD203B41FA5}">
+                      <a16:colId xmlns:a16="http://schemas.microsoft.com/office/drawing/2014/main" val="20000"/>
+                    </a:ext>
+                  </a:extLst>
+                </a:gridCol>
+                <a:gridCol w="560000">
+                  <a:extLst>
+                    <a:ext uri="{9D8B030D-6E8A-4147-A177-3AD203B41FA5}">
+                      <a16:colId xmlns:a16="http://schemas.microsoft.com/office/drawing/2014/main" val="20001"/>
+                    </a:ext>
+                  </a:extLst>
+                </a:gridCol>
+                <a:gridCol w="560000">
+                  <a:extLst>
+                    <a:ext uri="{9D8B030D-6E8A-4147-A177-3AD203B41FA5}">
+                      <a16:colId xmlns:a16="http://schemas.microsoft.com/office/drawing/2014/main" val="20002"/>
+                    </a:ext>
+                  </a:extLst>
+                </a:gridCol>
               </a:tblGrid>
               <a:tr h="460000">
                 <a:tc>
                   <a:txBody>
-                    <a:bodyPr wrap="square"/>
+                    <a:bodyPr/>
                     <a:lstStyle/>
                     <a:p>
                       <a:pPr algn="ctr"/>
@@ -6585,7 +7308,7 @@
                 </a:tc>
                 <a:tc>
                   <a:txBody>
-                    <a:bodyPr wrap="square"/>
+                    <a:bodyPr/>
                     <a:lstStyle/>
                     <a:p>
                       <a:pPr algn="ctr"/>
@@ -6603,7 +7326,7 @@
                 </a:tc>
                 <a:tc>
                   <a:txBody>
-                    <a:bodyPr wrap="square"/>
+                    <a:bodyPr/>
                     <a:lstStyle/>
                     <a:p>
                       <a:pPr algn="ctr"/>
@@ -6619,11 +7342,16 @@
                   </a:txBody>
                   <a:tcPr marL="60000" marR="60000" marT="25000" marB="25000" anchor="ctr"/>
                 </a:tc>
+                <a:extLst>
+                  <a:ext uri="{0D108BD9-81ED-4DB2-BD59-A6C34878D82A}">
+                    <a16:rowId xmlns:a16="http://schemas.microsoft.com/office/drawing/2014/main" val="10000"/>
+                  </a:ext>
+                </a:extLst>
               </a:tr>
               <a:tr h="460000">
                 <a:tc>
                   <a:txBody>
-                    <a:bodyPr wrap="square"/>
+                    <a:bodyPr/>
                     <a:lstStyle/>
                     <a:p>
                       <a:pPr algn="ctr"/>
@@ -6641,7 +7369,7 @@
                 </a:tc>
                 <a:tc>
                   <a:txBody>
-                    <a:bodyPr wrap="square"/>
+                    <a:bodyPr/>
                     <a:lstStyle/>
                     <a:p>
                       <a:pPr algn="ctr"/>
@@ -6659,7 +7387,7 @@
                 </a:tc>
                 <a:tc>
                   <a:txBody>
-                    <a:bodyPr wrap="square"/>
+                    <a:bodyPr/>
                     <a:lstStyle/>
                     <a:p>
                       <a:pPr algn="ctr"/>
@@ -6675,11 +7403,16 @@
                   </a:txBody>
                   <a:tcPr marL="60000" marR="60000" marT="25000" marB="25000" anchor="ctr"/>
                 </a:tc>
+                <a:extLst>
+                  <a:ext uri="{0D108BD9-81ED-4DB2-BD59-A6C34878D82A}">
+                    <a16:rowId xmlns:a16="http://schemas.microsoft.com/office/drawing/2014/main" val="10001"/>
+                  </a:ext>
+                </a:extLst>
               </a:tr>
               <a:tr h="460000">
                 <a:tc>
                   <a:txBody>
-                    <a:bodyPr wrap="square"/>
+                    <a:bodyPr/>
                     <a:lstStyle/>
                     <a:p>
                       <a:pPr algn="ctr"/>
@@ -6697,7 +7430,7 @@
                 </a:tc>
                 <a:tc>
                   <a:txBody>
-                    <a:bodyPr wrap="square"/>
+                    <a:bodyPr/>
                     <a:lstStyle/>
                     <a:p>
                       <a:pPr algn="ctr"/>
@@ -6715,7 +7448,7 @@
                 </a:tc>
                 <a:tc>
                   <a:txBody>
-                    <a:bodyPr wrap="square"/>
+                    <a:bodyPr/>
                     <a:lstStyle/>
                     <a:p>
                       <a:pPr algn="ctr"/>
@@ -6731,6 +7464,11 @@
                   </a:txBody>
                   <a:tcPr marL="60000" marR="60000" marT="25000" marB="25000" anchor="ctr"/>
                 </a:tc>
+                <a:extLst>
+                  <a:ext uri="{0D108BD9-81ED-4DB2-BD59-A6C34878D82A}">
+                    <a16:rowId xmlns:a16="http://schemas.microsoft.com/office/drawing/2014/main" val="10002"/>
+                  </a:ext>
+                </a:extLst>
               </a:tr>
             </a:tbl>
           </a:graphicData>
@@ -6745,7 +7483,7 @@
 </file>
 
 <file path=ppt/slides/slide2.xml><?xml version="1.0" encoding="utf-8"?>
-<p:sld xmlns:a="http://schemas.openxmlformats.org/drawingml/2006/main" xmlns:p="http://schemas.openxmlformats.org/presentationml/2006/main" xmlns:r="http://schemas.openxmlformats.org/officeDocument/2006/relationships">
+<p:sld xmlns:a="http://schemas.openxmlformats.org/drawingml/2006/main" xmlns:r="http://schemas.openxmlformats.org/officeDocument/2006/relationships" xmlns:p="http://schemas.openxmlformats.org/presentationml/2006/main">
   <p:cSld>
     <p:spTree>
       <p:nvGrpSpPr>
@@ -6753,7 +7491,14 @@
         <p:cNvGrpSpPr/>
         <p:nvPr/>
       </p:nvGrpSpPr>
-      <p:grpSpPr/>
+      <p:grpSpPr>
+        <a:xfrm>
+          <a:off x="0" y="0"/>
+          <a:ext cx="0" cy="0"/>
+          <a:chOff x="0" y="0"/>
+          <a:chExt cx="0" cy="0"/>
+        </a:xfrm>
+      </p:grpSpPr>
       <p:sp>
         <p:nvSpPr>
           <p:cNvPr id="2" name="Title 1"/>
@@ -6834,20 +7579,50 @@
         <a:graphic>
           <a:graphicData uri="http://schemas.openxmlformats.org/drawingml/2006/table">
             <a:tbl>
-              <a:tblPr firstRow="1" bandRow="0">
+              <a:tblPr firstRow="1">
                 <a:tableStyleId>{5940675A-B579-460E-94D1-54222C63F5DA}</a:tableStyleId>
               </a:tblPr>
               <a:tblGrid>
-                <a:gridCol w="1000000"/>
-                <a:gridCol w="3200000"/>
-                <a:gridCol w="1300000"/>
-                <a:gridCol w="2000000"/>
-                <a:gridCol w="2400000"/>
+                <a:gridCol w="1000000">
+                  <a:extLst>
+                    <a:ext uri="{9D8B030D-6E8A-4147-A177-3AD203B41FA5}">
+                      <a16:colId xmlns:a16="http://schemas.microsoft.com/office/drawing/2014/main" val="20000"/>
+                    </a:ext>
+                  </a:extLst>
+                </a:gridCol>
+                <a:gridCol w="3200000">
+                  <a:extLst>
+                    <a:ext uri="{9D8B030D-6E8A-4147-A177-3AD203B41FA5}">
+                      <a16:colId xmlns:a16="http://schemas.microsoft.com/office/drawing/2014/main" val="20001"/>
+                    </a:ext>
+                  </a:extLst>
+                </a:gridCol>
+                <a:gridCol w="1300000">
+                  <a:extLst>
+                    <a:ext uri="{9D8B030D-6E8A-4147-A177-3AD203B41FA5}">
+                      <a16:colId xmlns:a16="http://schemas.microsoft.com/office/drawing/2014/main" val="20002"/>
+                    </a:ext>
+                  </a:extLst>
+                </a:gridCol>
+                <a:gridCol w="2000000">
+                  <a:extLst>
+                    <a:ext uri="{9D8B030D-6E8A-4147-A177-3AD203B41FA5}">
+                      <a16:colId xmlns:a16="http://schemas.microsoft.com/office/drawing/2014/main" val="20003"/>
+                    </a:ext>
+                  </a:extLst>
+                </a:gridCol>
+                <a:gridCol w="2400000">
+                  <a:extLst>
+                    <a:ext uri="{9D8B030D-6E8A-4147-A177-3AD203B41FA5}">
+                      <a16:colId xmlns:a16="http://schemas.microsoft.com/office/drawing/2014/main" val="20004"/>
+                    </a:ext>
+                  </a:extLst>
+                </a:gridCol>
               </a:tblGrid>
               <a:tr h="560000">
                 <a:tc>
                   <a:txBody>
-                    <a:bodyPr wrap="square"/>
+                    <a:bodyPr/>
                     <a:lstStyle/>
                     <a:p>
                       <a:pPr algn="ctr"/>
@@ -6865,7 +7640,7 @@
                 </a:tc>
                 <a:tc>
                   <a:txBody>
-                    <a:bodyPr wrap="square"/>
+                    <a:bodyPr/>
                     <a:lstStyle/>
                     <a:p>
                       <a:pPr algn="ctr"/>
@@ -6883,7 +7658,7 @@
                 </a:tc>
                 <a:tc>
                   <a:txBody>
-                    <a:bodyPr wrap="square"/>
+                    <a:bodyPr/>
                     <a:lstStyle/>
                     <a:p>
                       <a:pPr algn="ctr"/>
@@ -6901,7 +7676,7 @@
                 </a:tc>
                 <a:tc>
                   <a:txBody>
-                    <a:bodyPr wrap="square"/>
+                    <a:bodyPr/>
                     <a:lstStyle/>
                     <a:p>
                       <a:pPr algn="ctr"/>
@@ -6919,7 +7694,7 @@
                 </a:tc>
                 <a:tc>
                   <a:txBody>
-                    <a:bodyPr wrap="square"/>
+                    <a:bodyPr/>
                     <a:lstStyle/>
                     <a:p>
                       <a:pPr algn="ctr"/>
@@ -6935,11 +7710,16 @@
                     </a:solidFill>
                   </a:tcPr>
                 </a:tc>
+                <a:extLst>
+                  <a:ext uri="{0D108BD9-81ED-4DB2-BD59-A6C34878D82A}">
+                    <a16:rowId xmlns:a16="http://schemas.microsoft.com/office/drawing/2014/main" val="10000"/>
+                  </a:ext>
+                </a:extLst>
               </a:tr>
               <a:tr h="560000">
                 <a:tc>
                   <a:txBody>
-                    <a:bodyPr wrap="square"/>
+                    <a:bodyPr/>
                     <a:lstStyle/>
                     <a:p>
                       <a:pPr algn="ctr"/>
@@ -6953,7 +7733,7 @@
                 </a:tc>
                 <a:tc>
                   <a:txBody>
-                    <a:bodyPr wrap="square"/>
+                    <a:bodyPr/>
                     <a:lstStyle/>
                     <a:p>
                       <a:pPr algn="ctr"/>
@@ -6967,7 +7747,7 @@
                 </a:tc>
                 <a:tc>
                   <a:txBody>
-                    <a:bodyPr wrap="square"/>
+                    <a:bodyPr/>
                     <a:lstStyle/>
                     <a:p>
                       <a:pPr algn="ctr"/>
@@ -6981,7 +7761,7 @@
                 </a:tc>
                 <a:tc>
                   <a:txBody>
-                    <a:bodyPr wrap="square"/>
+                    <a:bodyPr/>
                     <a:lstStyle/>
                     <a:p>
                       <a:pPr algn="ctr"/>
@@ -6992,7 +7772,7 @@
                 </a:tc>
                 <a:tc>
                   <a:txBody>
-                    <a:bodyPr wrap="square"/>
+                    <a:bodyPr/>
                     <a:lstStyle/>
                     <a:p>
                       <a:pPr algn="ctr"/>
@@ -7001,11 +7781,16 @@
                   </a:txBody>
                   <a:tcPr marL="60000" marR="60000" marT="25000" marB="25000" anchor="ctr"/>
                 </a:tc>
+                <a:extLst>
+                  <a:ext uri="{0D108BD9-81ED-4DB2-BD59-A6C34878D82A}">
+                    <a16:rowId xmlns:a16="http://schemas.microsoft.com/office/drawing/2014/main" val="10001"/>
+                  </a:ext>
+                </a:extLst>
               </a:tr>
               <a:tr h="560000">
                 <a:tc>
                   <a:txBody>
-                    <a:bodyPr wrap="square"/>
+                    <a:bodyPr/>
                     <a:lstStyle/>
                     <a:p>
                       <a:pPr algn="ctr"/>
@@ -7019,7 +7804,7 @@
                 </a:tc>
                 <a:tc>
                   <a:txBody>
-                    <a:bodyPr wrap="square"/>
+                    <a:bodyPr/>
                     <a:lstStyle/>
                     <a:p>
                       <a:pPr algn="ctr"/>
@@ -7033,7 +7818,7 @@
                 </a:tc>
                 <a:tc>
                   <a:txBody>
-                    <a:bodyPr wrap="square"/>
+                    <a:bodyPr/>
                     <a:lstStyle/>
                     <a:p>
                       <a:pPr algn="ctr"/>
@@ -7047,7 +7832,7 @@
                 </a:tc>
                 <a:tc>
                   <a:txBody>
-                    <a:bodyPr wrap="square"/>
+                    <a:bodyPr/>
                     <a:lstStyle/>
                     <a:p>
                       <a:pPr algn="ctr"/>
@@ -7058,7 +7843,7 @@
                 </a:tc>
                 <a:tc>
                   <a:txBody>
-                    <a:bodyPr wrap="square"/>
+                    <a:bodyPr/>
                     <a:lstStyle/>
                     <a:p>
                       <a:pPr algn="ctr"/>
@@ -7067,11 +7852,16 @@
                   </a:txBody>
                   <a:tcPr marL="60000" marR="60000" marT="25000" marB="25000" anchor="ctr"/>
                 </a:tc>
+                <a:extLst>
+                  <a:ext uri="{0D108BD9-81ED-4DB2-BD59-A6C34878D82A}">
+                    <a16:rowId xmlns:a16="http://schemas.microsoft.com/office/drawing/2014/main" val="10002"/>
+                  </a:ext>
+                </a:extLst>
               </a:tr>
               <a:tr h="560000">
                 <a:tc>
                   <a:txBody>
-                    <a:bodyPr wrap="square"/>
+                    <a:bodyPr/>
                     <a:lstStyle/>
                     <a:p>
                       <a:pPr algn="ctr"/>
@@ -7085,7 +7875,7 @@
                 </a:tc>
                 <a:tc>
                   <a:txBody>
-                    <a:bodyPr wrap="square"/>
+                    <a:bodyPr/>
                     <a:lstStyle/>
                     <a:p>
                       <a:pPr algn="ctr"/>
@@ -7099,7 +7889,7 @@
                 </a:tc>
                 <a:tc>
                   <a:txBody>
-                    <a:bodyPr wrap="square"/>
+                    <a:bodyPr/>
                     <a:lstStyle/>
                     <a:p>
                       <a:pPr algn="ctr"/>
@@ -7113,7 +7903,7 @@
                 </a:tc>
                 <a:tc>
                   <a:txBody>
-                    <a:bodyPr wrap="square"/>
+                    <a:bodyPr/>
                     <a:lstStyle/>
                     <a:p>
                       <a:pPr algn="ctr"/>
@@ -7124,7 +7914,7 @@
                 </a:tc>
                 <a:tc>
                   <a:txBody>
-                    <a:bodyPr wrap="square"/>
+                    <a:bodyPr/>
                     <a:lstStyle/>
                     <a:p>
                       <a:pPr algn="ctr"/>
@@ -7133,11 +7923,16 @@
                   </a:txBody>
                   <a:tcPr marL="60000" marR="60000" marT="25000" marB="25000" anchor="ctr"/>
                 </a:tc>
+                <a:extLst>
+                  <a:ext uri="{0D108BD9-81ED-4DB2-BD59-A6C34878D82A}">
+                    <a16:rowId xmlns:a16="http://schemas.microsoft.com/office/drawing/2014/main" val="10003"/>
+                  </a:ext>
+                </a:extLst>
               </a:tr>
               <a:tr h="560000">
                 <a:tc>
                   <a:txBody>
-                    <a:bodyPr wrap="square"/>
+                    <a:bodyPr/>
                     <a:lstStyle/>
                     <a:p>
                       <a:pPr algn="ctr"/>
@@ -7151,7 +7946,7 @@
                 </a:tc>
                 <a:tc>
                   <a:txBody>
-                    <a:bodyPr wrap="square"/>
+                    <a:bodyPr/>
                     <a:lstStyle/>
                     <a:p>
                       <a:pPr algn="ctr"/>
@@ -7165,7 +7960,7 @@
                 </a:tc>
                 <a:tc>
                   <a:txBody>
-                    <a:bodyPr wrap="square"/>
+                    <a:bodyPr/>
                     <a:lstStyle/>
                     <a:p>
                       <a:pPr algn="ctr"/>
@@ -7179,7 +7974,7 @@
                 </a:tc>
                 <a:tc>
                   <a:txBody>
-                    <a:bodyPr wrap="square"/>
+                    <a:bodyPr/>
                     <a:lstStyle/>
                     <a:p>
                       <a:pPr algn="ctr"/>
@@ -7190,7 +7985,7 @@
                 </a:tc>
                 <a:tc>
                   <a:txBody>
-                    <a:bodyPr wrap="square"/>
+                    <a:bodyPr/>
                     <a:lstStyle/>
                     <a:p>
                       <a:pPr algn="ctr"/>
@@ -7199,6 +7994,11 @@
                   </a:txBody>
                   <a:tcPr marL="60000" marR="60000" marT="25000" marB="25000" anchor="ctr"/>
                 </a:tc>
+                <a:extLst>
+                  <a:ext uri="{0D108BD9-81ED-4DB2-BD59-A6C34878D82A}">
+                    <a16:rowId xmlns:a16="http://schemas.microsoft.com/office/drawing/2014/main" val="10004"/>
+                  </a:ext>
+                </a:extLst>
               </a:tr>
             </a:tbl>
           </a:graphicData>
@@ -7213,7 +8013,7 @@
 </file>
 
 <file path=ppt/slides/slide3.xml><?xml version="1.0" encoding="utf-8"?>
-<p:sld xmlns:a="http://schemas.openxmlformats.org/drawingml/2006/main" xmlns:p="http://schemas.openxmlformats.org/presentationml/2006/main" xmlns:r="http://schemas.openxmlformats.org/officeDocument/2006/relationships">
+<p:sld xmlns:a="http://schemas.openxmlformats.org/drawingml/2006/main" xmlns:r="http://schemas.openxmlformats.org/officeDocument/2006/relationships" xmlns:p="http://schemas.openxmlformats.org/presentationml/2006/main">
   <p:cSld>
     <p:spTree>
       <p:nvGrpSpPr>
@@ -7221,7 +8021,14 @@
         <p:cNvGrpSpPr/>
         <p:nvPr/>
       </p:nvGrpSpPr>
-      <p:grpSpPr/>
+      <p:grpSpPr>
+        <a:xfrm>
+          <a:off x="0" y="0"/>
+          <a:ext cx="0" cy="0"/>
+          <a:chOff x="0" y="0"/>
+          <a:chExt cx="0" cy="0"/>
+        </a:xfrm>
+      </p:grpSpPr>
       <p:sp>
         <p:nvSpPr>
           <p:cNvPr id="2" name="Title 1"/>
@@ -7269,11 +8076,15 @@
           <a:lstStyle/>
           <a:p>
             <a:r>
-              <a:rPr sz="1900"/>
-              <a:t>IoU(A, B): intersection 40 × 40 = 1,600, union 2,500 + 2,500 − 1,600 = 3,400 → </a:t>
-            </a:r>
-            <a:r>
-              <a:rPr sz="1900" b="1">
+              <a:rPr sz="1900" dirty="0" err="1"/>
+              <a:t>IoU</a:t>
+            </a:r>
+            <a:r>
+              <a:rPr sz="1900" dirty="0"/>
+              <a:t>(A, B): intersection 40 × 40 = 1,600, union 2,500 + 2,500 − 1,600 = 3,400 → </a:t>
+            </a:r>
+            <a:r>
+              <a:rPr sz="1900" b="1" dirty="0">
                 <a:solidFill>
                   <a:srgbClr val="2A40E2"/>
                 </a:solidFill>
@@ -7281,11 +8092,19 @@
               <a:t>0.47</a:t>
             </a:r>
             <a:r>
-              <a:rPr sz="1900"/>
-              <a:t>. IoU(A, C): 48 × 48 = 2,304, union 2,696 → </a:t>
-            </a:r>
-            <a:r>
-              <a:rPr sz="1900" b="1">
+              <a:rPr sz="1900" dirty="0"/>
+              <a:t>. </a:t>
+            </a:r>
+            <a:r>
+              <a:rPr sz="1900" dirty="0" err="1"/>
+              <a:t>IoU</a:t>
+            </a:r>
+            <a:r>
+              <a:rPr sz="1900" dirty="0"/>
+              <a:t>(A, C): 48 × 48 = 2,304, union 2,696 → </a:t>
+            </a:r>
+            <a:r>
+              <a:rPr sz="1900" b="1" dirty="0">
                 <a:solidFill>
                   <a:srgbClr val="2A40E2"/>
                 </a:solidFill>
@@ -7293,11 +8112,19 @@
               <a:t>0.85</a:t>
             </a:r>
             <a:r>
-              <a:rPr sz="1900"/>
-              <a:t>. IoU(A, D) = </a:t>
-            </a:r>
-            <a:r>
-              <a:rPr sz="1900" b="1">
+              <a:rPr sz="1900" dirty="0"/>
+              <a:t>. </a:t>
+            </a:r>
+            <a:r>
+              <a:rPr sz="1900" dirty="0" err="1"/>
+              <a:t>IoU</a:t>
+            </a:r>
+            <a:r>
+              <a:rPr sz="1900" dirty="0"/>
+              <a:t>(A, D) = </a:t>
+            </a:r>
+            <a:r>
+              <a:rPr sz="1900" b="1" dirty="0">
                 <a:solidFill>
                   <a:srgbClr val="2A40E2"/>
                 </a:solidFill>
@@ -7305,17 +8132,17 @@
               <a:t>0</a:t>
             </a:r>
             <a:r>
-              <a:rPr sz="1900"/>
+              <a:rPr sz="1900" dirty="0"/>
               <a:t>.</a:t>
             </a:r>
           </a:p>
           <a:p>
             <a:r>
-              <a:rPr sz="1900"/>
+              <a:rPr sz="1900" dirty="0"/>
               <a:t>Threshold 0.5: keep A; suppress C (0.85); B survives (0.47 ≤ 0.5); D survives → </a:t>
             </a:r>
             <a:r>
-              <a:rPr sz="1900" b="1">
+              <a:rPr sz="1900" b="1" dirty="0">
                 <a:solidFill>
                   <a:srgbClr val="2A40E2"/>
                 </a:solidFill>
@@ -7323,17 +8150,17 @@
               <a:t>A, B, D</a:t>
             </a:r>
             <a:r>
-              <a:rPr sz="1900"/>
+              <a:rPr sz="1900" dirty="0"/>
               <a:t>.</a:t>
             </a:r>
           </a:p>
           <a:p>
             <a:r>
-              <a:rPr sz="1900"/>
+              <a:rPr sz="1900" dirty="0"/>
               <a:t>Threshold 0.4: B is also suppressed (0.47 &gt; 0.4) → </a:t>
             </a:r>
             <a:r>
-              <a:rPr sz="1900" b="1">
+              <a:rPr sz="1900" b="1" dirty="0">
                 <a:solidFill>
                   <a:srgbClr val="2A40E2"/>
                 </a:solidFill>
@@ -7341,7 +8168,7 @@
               <a:t>A, D</a:t>
             </a:r>
             <a:r>
-              <a:rPr sz="1900"/>
+              <a:rPr sz="1900" dirty="0"/>
               <a:t>. A low threshold risks removing a second object that overlaps the first.</a:t>
             </a:r>
           </a:p>
@@ -7353,29 +8180,72 @@
           <p:cNvGraphicFramePr>
             <a:graphicFrameLocks noGrp="1"/>
           </p:cNvGraphicFramePr>
-          <p:nvPr/>
+          <p:nvPr>
+            <p:extLst>
+              <p:ext uri="{D42A27DB-BD31-4B8C-83A1-F6EECF244321}">
+                <p14:modId xmlns:p14="http://schemas.microsoft.com/office/powerpoint/2010/main" val="756432877"/>
+              </p:ext>
+            </p:extLst>
+          </p:nvPr>
         </p:nvGraphicFramePr>
         <p:xfrm>
-          <a:off x="900000" y="3500000"/>
-          <a:ext cx="9900000" cy="2800000"/>
+          <a:off x="1752600" y="3400000"/>
+          <a:ext cx="8396397" cy="2877280"/>
         </p:xfrm>
         <a:graphic>
           <a:graphicData uri="http://schemas.openxmlformats.org/drawingml/2006/table">
             <a:tbl>
-              <a:tblPr firstRow="1" bandRow="0">
+              <a:tblPr firstRow="1">
                 <a:tableStyleId>{5940675A-B579-460E-94D1-54222C63F5DA}</a:tableStyleId>
               </a:tblPr>
               <a:tblGrid>
-                <a:gridCol w="1000000"/>
-                <a:gridCol w="3200000"/>
-                <a:gridCol w="1300000"/>
-                <a:gridCol w="2000000"/>
-                <a:gridCol w="2400000"/>
+                <a:gridCol w="657242">
+                  <a:extLst>
+                    <a:ext uri="{9D8B030D-6E8A-4147-A177-3AD203B41FA5}">
+                      <a16:colId xmlns:a16="http://schemas.microsoft.com/office/drawing/2014/main" val="20000"/>
+                    </a:ext>
+                  </a:extLst>
+                </a:gridCol>
+                <a:gridCol w="2103174">
+                  <a:extLst>
+                    <a:ext uri="{9D8B030D-6E8A-4147-A177-3AD203B41FA5}">
+                      <a16:colId xmlns:a16="http://schemas.microsoft.com/office/drawing/2014/main" val="20001"/>
+                    </a:ext>
+                  </a:extLst>
+                </a:gridCol>
+                <a:gridCol w="854415">
+                  <a:extLst>
+                    <a:ext uri="{9D8B030D-6E8A-4147-A177-3AD203B41FA5}">
+                      <a16:colId xmlns:a16="http://schemas.microsoft.com/office/drawing/2014/main" val="20002"/>
+                    </a:ext>
+                  </a:extLst>
+                </a:gridCol>
+                <a:gridCol w="1002162">
+                  <a:extLst>
+                    <a:ext uri="{9D8B030D-6E8A-4147-A177-3AD203B41FA5}">
+                      <a16:colId xmlns:a16="http://schemas.microsoft.com/office/drawing/2014/main" val="20003"/>
+                    </a:ext>
+                  </a:extLst>
+                </a:gridCol>
+                <a:gridCol w="1889702">
+                  <a:extLst>
+                    <a:ext uri="{9D8B030D-6E8A-4147-A177-3AD203B41FA5}">
+                      <a16:colId xmlns:a16="http://schemas.microsoft.com/office/drawing/2014/main" val="20004"/>
+                    </a:ext>
+                  </a:extLst>
+                </a:gridCol>
+                <a:gridCol w="1889702">
+                  <a:extLst>
+                    <a:ext uri="{9D8B030D-6E8A-4147-A177-3AD203B41FA5}">
+                      <a16:colId xmlns:a16="http://schemas.microsoft.com/office/drawing/2014/main" val="1076939073"/>
+                    </a:ext>
+                  </a:extLst>
+                </a:gridCol>
               </a:tblGrid>
               <a:tr h="560000">
                 <a:tc>
                   <a:txBody>
-                    <a:bodyPr wrap="square"/>
+                    <a:bodyPr/>
                     <a:lstStyle/>
                     <a:p>
                       <a:pPr algn="ctr"/>
@@ -7393,7 +8263,7 @@
                 </a:tc>
                 <a:tc>
                   <a:txBody>
-                    <a:bodyPr wrap="square"/>
+                    <a:bodyPr/>
                     <a:lstStyle/>
                     <a:p>
                       <a:pPr algn="ctr"/>
@@ -7411,7 +8281,7 @@
                 </a:tc>
                 <a:tc>
                   <a:txBody>
-                    <a:bodyPr wrap="square"/>
+                    <a:bodyPr/>
                     <a:lstStyle/>
                     <a:p>
                       <a:pPr algn="ctr"/>
@@ -7429,7 +8299,7 @@
                 </a:tc>
                 <a:tc>
                   <a:txBody>
-                    <a:bodyPr wrap="square"/>
+                    <a:bodyPr/>
                     <a:lstStyle/>
                     <a:p>
                       <a:pPr algn="ctr"/>
@@ -7447,13 +8317,21 @@
                 </a:tc>
                 <a:tc>
                   <a:txBody>
-                    <a:bodyPr wrap="square"/>
-                    <a:lstStyle/>
-                    <a:p>
-                      <a:pPr algn="ctr"/>
-                      <a:r>
-                        <a:rPr sz="1800" b="1"/>
-                        <a:t>NMS, thr. 0.5</a:t>
+                    <a:bodyPr/>
+                    <a:lstStyle/>
+                    <a:p>
+                      <a:pPr algn="ctr"/>
+                      <a:r>
+                        <a:rPr sz="1800" b="1" dirty="0"/>
+                        <a:t>NMS, </a:t>
+                      </a:r>
+                      <a:r>
+                        <a:rPr sz="1800" b="1" dirty="0" err="1"/>
+                        <a:t>thr</a:t>
+                      </a:r>
+                      <a:r>
+                        <a:rPr sz="1800" b="1" dirty="0"/>
+                        <a:t>. 0.5</a:t>
                       </a:r>
                     </a:p>
                   </a:txBody>
@@ -7463,11 +8341,58 @@
                     </a:solidFill>
                   </a:tcPr>
                 </a:tc>
+                <a:tc>
+                  <a:txBody>
+                    <a:bodyPr/>
+                    <a:lstStyle/>
+                    <a:p>
+                      <a:pPr marL="0" marR="0" lvl="0" indent="0" algn="ctr" defTabSz="914400" rtl="0" eaLnBrk="1" fontAlgn="auto" latinLnBrk="0" hangingPunct="1">
+                        <a:lnSpc>
+                          <a:spcPct val="100000"/>
+                        </a:lnSpc>
+                        <a:spcBef>
+                          <a:spcPts val="0"/>
+                        </a:spcBef>
+                        <a:spcAft>
+                          <a:spcPts val="0"/>
+                        </a:spcAft>
+                        <a:buClrTx/>
+                        <a:buSzTx/>
+                        <a:buFontTx/>
+                        <a:buNone/>
+                        <a:tabLst/>
+                        <a:defRPr/>
+                      </a:pPr>
+                      <a:r>
+                        <a:rPr lang="en-US" sz="1800" b="1" dirty="0"/>
+                        <a:t>NMS, </a:t>
+                      </a:r>
+                      <a:r>
+                        <a:rPr lang="en-US" sz="1800" b="1" dirty="0" err="1"/>
+                        <a:t>thr</a:t>
+                      </a:r>
+                      <a:r>
+                        <a:rPr lang="en-US" sz="1800" b="1" dirty="0"/>
+                        <a:t>. 0.4</a:t>
+                      </a:r>
+                    </a:p>
+                  </a:txBody>
+                  <a:tcPr marL="60000" marR="60000" marT="25000" marB="25000" anchor="ctr">
+                    <a:solidFill>
+                      <a:srgbClr val="F2F2F2"/>
+                    </a:solidFill>
+                  </a:tcPr>
+                </a:tc>
+                <a:extLst>
+                  <a:ext uri="{0D108BD9-81ED-4DB2-BD59-A6C34878D82A}">
+                    <a16:rowId xmlns:a16="http://schemas.microsoft.com/office/drawing/2014/main" val="10000"/>
+                  </a:ext>
+                </a:extLst>
               </a:tr>
               <a:tr h="560000">
                 <a:tc>
                   <a:txBody>
-                    <a:bodyPr wrap="square"/>
+                    <a:bodyPr/>
                     <a:lstStyle/>
                     <a:p>
                       <a:pPr algn="ctr"/>
@@ -7481,7 +8406,7 @@
                 </a:tc>
                 <a:tc>
                   <a:txBody>
-                    <a:bodyPr wrap="square"/>
+                    <a:bodyPr/>
                     <a:lstStyle/>
                     <a:p>
                       <a:pPr algn="ctr"/>
@@ -7495,7 +8420,7 @@
                 </a:tc>
                 <a:tc>
                   <a:txBody>
-                    <a:bodyPr wrap="square"/>
+                    <a:bodyPr/>
                     <a:lstStyle/>
                     <a:p>
                       <a:pPr algn="ctr"/>
@@ -7509,7 +8434,7 @@
                 </a:tc>
                 <a:tc>
                   <a:txBody>
-                    <a:bodyPr wrap="square"/>
+                    <a:bodyPr/>
                     <a:lstStyle/>
                     <a:p>
                       <a:pPr algn="ctr"/>
@@ -7527,12 +8452,12 @@
                 </a:tc>
                 <a:tc>
                   <a:txBody>
-                    <a:bodyPr wrap="square"/>
-                    <a:lstStyle/>
-                    <a:p>
-                      <a:pPr algn="ctr"/>
-                      <a:r>
-                        <a:rPr sz="1800" b="1">
+                    <a:bodyPr/>
+                    <a:lstStyle/>
+                    <a:p>
+                      <a:pPr algn="ctr"/>
+                      <a:r>
+                        <a:rPr sz="1800" b="1" dirty="0">
                           <a:solidFill>
                             <a:srgbClr val="2A40E2"/>
                           </a:solidFill>
@@ -7543,11 +8468,34 @@
                   </a:txBody>
                   <a:tcPr marL="60000" marR="60000" marT="25000" marB="25000" anchor="ctr"/>
                 </a:tc>
+                <a:tc>
+                  <a:txBody>
+                    <a:bodyPr/>
+                    <a:lstStyle/>
+                    <a:p>
+                      <a:pPr algn="ctr"/>
+                      <a:r>
+                        <a:rPr sz="1800" b="1" dirty="0">
+                          <a:solidFill>
+                            <a:srgbClr val="2A40E2"/>
+                          </a:solidFill>
+                        </a:rPr>
+                        <a:t>keep</a:t>
+                      </a:r>
+                    </a:p>
+                  </a:txBody>
+                  <a:tcPr marL="60000" marR="60000" marT="25000" marB="25000" anchor="ctr"/>
+                </a:tc>
+                <a:extLst>
+                  <a:ext uri="{0D108BD9-81ED-4DB2-BD59-A6C34878D82A}">
+                    <a16:rowId xmlns:a16="http://schemas.microsoft.com/office/drawing/2014/main" val="10001"/>
+                  </a:ext>
+                </a:extLst>
               </a:tr>
               <a:tr h="560000">
                 <a:tc>
                   <a:txBody>
-                    <a:bodyPr wrap="square"/>
+                    <a:bodyPr/>
                     <a:lstStyle/>
                     <a:p>
                       <a:pPr algn="ctr"/>
@@ -7561,7 +8509,7 @@
                 </a:tc>
                 <a:tc>
                   <a:txBody>
-                    <a:bodyPr wrap="square"/>
+                    <a:bodyPr/>
                     <a:lstStyle/>
                     <a:p>
                       <a:pPr algn="ctr"/>
@@ -7575,7 +8523,7 @@
                 </a:tc>
                 <a:tc>
                   <a:txBody>
-                    <a:bodyPr wrap="square"/>
+                    <a:bodyPr/>
                     <a:lstStyle/>
                     <a:p>
                       <a:pPr algn="ctr"/>
@@ -7589,7 +8537,7 @@
                 </a:tc>
                 <a:tc>
                   <a:txBody>
-                    <a:bodyPr wrap="square"/>
+                    <a:bodyPr/>
                     <a:lstStyle/>
                     <a:p>
                       <a:pPr algn="ctr"/>
@@ -7607,12 +8555,12 @@
                 </a:tc>
                 <a:tc>
                   <a:txBody>
-                    <a:bodyPr wrap="square"/>
-                    <a:lstStyle/>
-                    <a:p>
-                      <a:pPr algn="ctr"/>
-                      <a:r>
-                        <a:rPr sz="1800" b="1">
+                    <a:bodyPr/>
+                    <a:lstStyle/>
+                    <a:p>
+                      <a:pPr algn="ctr"/>
+                      <a:r>
+                        <a:rPr sz="1800" b="1" dirty="0">
                           <a:solidFill>
                             <a:srgbClr val="2A40E2"/>
                           </a:solidFill>
@@ -7623,11 +8571,39 @@
                   </a:txBody>
                   <a:tcPr marL="60000" marR="60000" marT="25000" marB="25000" anchor="ctr"/>
                 </a:tc>
+                <a:tc>
+                  <a:txBody>
+                    <a:bodyPr/>
+                    <a:lstStyle/>
+                    <a:p>
+                      <a:pPr algn="ctr"/>
+                      <a:r>
+                        <a:rPr lang="en-US" sz="1800" b="1" dirty="0">
+                          <a:solidFill>
+                            <a:srgbClr val="2A40E2"/>
+                          </a:solidFill>
+                        </a:rPr>
+                        <a:t>suppress</a:t>
+                      </a:r>
+                      <a:endParaRPr sz="1800" b="1" dirty="0">
+                        <a:solidFill>
+                          <a:srgbClr val="2A40E2"/>
+                        </a:solidFill>
+                      </a:endParaRPr>
+                    </a:p>
+                  </a:txBody>
+                  <a:tcPr marL="60000" marR="60000" marT="25000" marB="25000" anchor="ctr"/>
+                </a:tc>
+                <a:extLst>
+                  <a:ext uri="{0D108BD9-81ED-4DB2-BD59-A6C34878D82A}">
+                    <a16:rowId xmlns:a16="http://schemas.microsoft.com/office/drawing/2014/main" val="10002"/>
+                  </a:ext>
+                </a:extLst>
               </a:tr>
               <a:tr h="560000">
                 <a:tc>
                   <a:txBody>
-                    <a:bodyPr wrap="square"/>
+                    <a:bodyPr/>
                     <a:lstStyle/>
                     <a:p>
                       <a:pPr algn="ctr"/>
@@ -7641,7 +8617,7 @@
                 </a:tc>
                 <a:tc>
                   <a:txBody>
-                    <a:bodyPr wrap="square"/>
+                    <a:bodyPr/>
                     <a:lstStyle/>
                     <a:p>
                       <a:pPr algn="ctr"/>
@@ -7655,7 +8631,7 @@
                 </a:tc>
                 <a:tc>
                   <a:txBody>
-                    <a:bodyPr wrap="square"/>
+                    <a:bodyPr/>
                     <a:lstStyle/>
                     <a:p>
                       <a:pPr algn="ctr"/>
@@ -7669,7 +8645,7 @@
                 </a:tc>
                 <a:tc>
                   <a:txBody>
-                    <a:bodyPr wrap="square"/>
+                    <a:bodyPr/>
                     <a:lstStyle/>
                     <a:p>
                       <a:pPr algn="ctr"/>
@@ -7687,12 +8663,12 @@
                 </a:tc>
                 <a:tc>
                   <a:txBody>
-                    <a:bodyPr wrap="square"/>
-                    <a:lstStyle/>
-                    <a:p>
-                      <a:pPr algn="ctr"/>
-                      <a:r>
-                        <a:rPr sz="1800" b="1">
+                    <a:bodyPr/>
+                    <a:lstStyle/>
+                    <a:p>
+                      <a:pPr algn="ctr"/>
+                      <a:r>
+                        <a:rPr sz="1800" b="1" dirty="0">
                           <a:solidFill>
                             <a:srgbClr val="2A40E2"/>
                           </a:solidFill>
@@ -7703,11 +8679,34 @@
                   </a:txBody>
                   <a:tcPr marL="60000" marR="60000" marT="25000" marB="25000" anchor="ctr"/>
                 </a:tc>
+                <a:tc>
+                  <a:txBody>
+                    <a:bodyPr/>
+                    <a:lstStyle/>
+                    <a:p>
+                      <a:pPr algn="ctr"/>
+                      <a:r>
+                        <a:rPr sz="1800" b="1" dirty="0">
+                          <a:solidFill>
+                            <a:srgbClr val="2A40E2"/>
+                          </a:solidFill>
+                        </a:rPr>
+                        <a:t>suppress</a:t>
+                      </a:r>
+                    </a:p>
+                  </a:txBody>
+                  <a:tcPr marL="60000" marR="60000" marT="25000" marB="25000" anchor="ctr"/>
+                </a:tc>
+                <a:extLst>
+                  <a:ext uri="{0D108BD9-81ED-4DB2-BD59-A6C34878D82A}">
+                    <a16:rowId xmlns:a16="http://schemas.microsoft.com/office/drawing/2014/main" val="10003"/>
+                  </a:ext>
+                </a:extLst>
               </a:tr>
               <a:tr h="560000">
                 <a:tc>
                   <a:txBody>
-                    <a:bodyPr wrap="square"/>
+                    <a:bodyPr/>
                     <a:lstStyle/>
                     <a:p>
                       <a:pPr algn="ctr"/>
@@ -7721,7 +8720,7 @@
                 </a:tc>
                 <a:tc>
                   <a:txBody>
-                    <a:bodyPr wrap="square"/>
+                    <a:bodyPr/>
                     <a:lstStyle/>
                     <a:p>
                       <a:pPr algn="ctr"/>
@@ -7735,7 +8734,7 @@
                 </a:tc>
                 <a:tc>
                   <a:txBody>
-                    <a:bodyPr wrap="square"/>
+                    <a:bodyPr/>
                     <a:lstStyle/>
                     <a:p>
                       <a:pPr algn="ctr"/>
@@ -7749,7 +8748,7 @@
                 </a:tc>
                 <a:tc>
                   <a:txBody>
-                    <a:bodyPr wrap="square"/>
+                    <a:bodyPr/>
                     <a:lstStyle/>
                     <a:p>
                       <a:pPr algn="ctr"/>
@@ -7767,12 +8766,12 @@
                 </a:tc>
                 <a:tc>
                   <a:txBody>
-                    <a:bodyPr wrap="square"/>
-                    <a:lstStyle/>
-                    <a:p>
-                      <a:pPr algn="ctr"/>
-                      <a:r>
-                        <a:rPr sz="1800" b="1">
+                    <a:bodyPr/>
+                    <a:lstStyle/>
+                    <a:p>
+                      <a:pPr algn="ctr"/>
+                      <a:r>
+                        <a:rPr sz="1800" b="1" dirty="0">
                           <a:solidFill>
                             <a:srgbClr val="2A40E2"/>
                           </a:solidFill>
@@ -7783,6 +8782,29 @@
                   </a:txBody>
                   <a:tcPr marL="60000" marR="60000" marT="25000" marB="25000" anchor="ctr"/>
                 </a:tc>
+                <a:tc>
+                  <a:txBody>
+                    <a:bodyPr/>
+                    <a:lstStyle/>
+                    <a:p>
+                      <a:pPr algn="ctr"/>
+                      <a:r>
+                        <a:rPr sz="1800" b="1" dirty="0">
+                          <a:solidFill>
+                            <a:srgbClr val="2A40E2"/>
+                          </a:solidFill>
+                        </a:rPr>
+                        <a:t>keep</a:t>
+                      </a:r>
+                    </a:p>
+                  </a:txBody>
+                  <a:tcPr marL="60000" marR="60000" marT="25000" marB="25000" anchor="ctr"/>
+                </a:tc>
+                <a:extLst>
+                  <a:ext uri="{0D108BD9-81ED-4DB2-BD59-A6C34878D82A}">
+                    <a16:rowId xmlns:a16="http://schemas.microsoft.com/office/drawing/2014/main" val="10004"/>
+                  </a:ext>
+                </a:extLst>
               </a:tr>
             </a:tbl>
           </a:graphicData>
@@ -7797,7 +8819,7 @@
 </file>
 
 <file path=ppt/slides/slide4.xml><?xml version="1.0" encoding="utf-8"?>
-<p:sld xmlns:a="http://schemas.openxmlformats.org/drawingml/2006/main" xmlns:p="http://schemas.openxmlformats.org/presentationml/2006/main" xmlns:r="http://schemas.openxmlformats.org/officeDocument/2006/relationships">
+<p:sld xmlns:a="http://schemas.openxmlformats.org/drawingml/2006/main" xmlns:r="http://schemas.openxmlformats.org/officeDocument/2006/relationships" xmlns:p="http://schemas.openxmlformats.org/presentationml/2006/main">
   <p:cSld>
     <p:spTree>
       <p:nvGrpSpPr>
@@ -7805,7 +8827,534 @@
         <p:cNvGrpSpPr/>
         <p:nvPr/>
       </p:nvGrpSpPr>
-      <p:grpSpPr/>
+      <p:grpSpPr>
+        <a:xfrm>
+          <a:off x="0" y="0"/>
+          <a:ext cx="0" cy="0"/>
+          <a:chOff x="0" y="0"/>
+          <a:chExt cx="0" cy="0"/>
+        </a:xfrm>
+      </p:grpSpPr>
+      <p:sp>
+        <p:nvSpPr>
+          <p:cNvPr id="2" name="Title 1">
+            <a:extLst>
+              <a:ext uri="{FF2B5EF4-FFF2-40B4-BE49-F238E27FC236}">
+                <a16:creationId xmlns:a16="http://schemas.microsoft.com/office/drawing/2014/main" id="{43B6B437-2E9B-4341-84DB-426B4203E8BF}"/>
+              </a:ext>
+            </a:extLst>
+          </p:cNvPr>
+          <p:cNvSpPr>
+            <a:spLocks noGrp="1"/>
+          </p:cNvSpPr>
+          <p:nvPr>
+            <p:ph type="title"/>
+          </p:nvPr>
+        </p:nvSpPr>
+        <p:spPr/>
+        <p:txBody>
+          <a:bodyPr/>
+          <a:lstStyle/>
+          <a:p>
+            <a:r>
+              <a:rPr lang="en-US" dirty="0"/>
+              <a:t>Calculating </a:t>
+            </a:r>
+            <a:r>
+              <a:rPr lang="en-US" dirty="0" err="1"/>
+              <a:t>IoU</a:t>
+            </a:r>
+            <a:r>
+              <a:rPr lang="en-US" dirty="0"/>
+              <a:t>(A, B)</a:t>
+            </a:r>
+          </a:p>
+        </p:txBody>
+      </p:sp>
+      <p:sp>
+        <p:nvSpPr>
+          <p:cNvPr id="3" name="Content Placeholder 2">
+            <a:extLst>
+              <a:ext uri="{FF2B5EF4-FFF2-40B4-BE49-F238E27FC236}">
+                <a16:creationId xmlns:a16="http://schemas.microsoft.com/office/drawing/2014/main" id="{CADE3A1E-4696-4EDF-83EE-42DB0F906D45}"/>
+              </a:ext>
+            </a:extLst>
+          </p:cNvPr>
+          <p:cNvSpPr>
+            <a:spLocks noGrp="1"/>
+          </p:cNvSpPr>
+          <p:nvPr>
+            <p:ph idx="1"/>
+          </p:nvPr>
+        </p:nvSpPr>
+        <p:spPr/>
+        <p:txBody>
+          <a:bodyPr>
+            <a:normAutofit fontScale="77500" lnSpcReduction="20000"/>
+          </a:bodyPr>
+          <a:lstStyle/>
+          <a:p>
+            <a:pPr algn="l"/>
+            <a:r>
+              <a:rPr lang="en-US" b="0" i="0" dirty="0">
+                <a:solidFill>
+                  <a:srgbClr val="0D0D0D"/>
+                </a:solidFill>
+                <a:effectLst/>
+                <a:latin typeface="-apple-system-body"/>
+              </a:rPr>
+              <a:t>The coordinates of the boxes are (lower left corner and upper right corner):</a:t>
+            </a:r>
+          </a:p>
+          <a:p>
+            <a:pPr lvl="1">
+              <a:buFont typeface="Arial" panose="020B0604020202020204" pitchFamily="34" charset="0"/>
+              <a:buChar char="•"/>
+            </a:pPr>
+            <a:r>
+              <a:rPr lang="en-US" b="0" i="0" dirty="0">
+                <a:solidFill>
+                  <a:srgbClr val="0D0D0D"/>
+                </a:solidFill>
+                <a:effectLst/>
+                <a:latin typeface="-apple-system-body"/>
+              </a:rPr>
+              <a:t>Box A: </a:t>
+            </a:r>
+            <a:r>
+              <a:rPr lang="en-US" b="0" i="0" dirty="0">
+                <a:solidFill>
+                  <a:srgbClr val="0D0D0D"/>
+                </a:solidFill>
+                <a:effectLst/>
+                <a:latin typeface="KaTeX_Main"/>
+              </a:rPr>
+              <a:t>(10,10,60,60)</a:t>
+            </a:r>
+            <a:endParaRPr lang="en-US" b="0" i="0" dirty="0">
+              <a:solidFill>
+                <a:srgbClr val="0D0D0D"/>
+              </a:solidFill>
+              <a:effectLst/>
+              <a:latin typeface="-apple-system-body"/>
+            </a:endParaRPr>
+          </a:p>
+          <a:p>
+            <a:pPr lvl="1">
+              <a:buFont typeface="Arial" panose="020B0604020202020204" pitchFamily="34" charset="0"/>
+              <a:buChar char="•"/>
+            </a:pPr>
+            <a:r>
+              <a:rPr lang="en-US" b="0" i="0" dirty="0">
+                <a:solidFill>
+                  <a:srgbClr val="0D0D0D"/>
+                </a:solidFill>
+                <a:effectLst/>
+                <a:latin typeface="-apple-system-body"/>
+              </a:rPr>
+              <a:t>Box B: </a:t>
+            </a:r>
+            <a:r>
+              <a:rPr lang="en-US" b="0" i="0" dirty="0">
+                <a:solidFill>
+                  <a:srgbClr val="0D0D0D"/>
+                </a:solidFill>
+                <a:effectLst/>
+                <a:latin typeface="KaTeX_Main"/>
+              </a:rPr>
+              <a:t>(20,20,70,70)</a:t>
+            </a:r>
+            <a:endParaRPr lang="en-US" b="0" i="0" dirty="0">
+              <a:solidFill>
+                <a:srgbClr val="0D0D0D"/>
+              </a:solidFill>
+              <a:effectLst/>
+              <a:latin typeface="-apple-system-body"/>
+            </a:endParaRPr>
+          </a:p>
+          <a:p>
+            <a:pPr algn="l"/>
+            <a:r>
+              <a:rPr lang="en-US" b="0" i="0" dirty="0">
+                <a:solidFill>
+                  <a:srgbClr val="0D0D0D"/>
+                </a:solidFill>
+                <a:effectLst/>
+                <a:latin typeface="-apple-system-body"/>
+              </a:rPr>
+              <a:t>Each box has a width and height of 50, so each has an area of:</a:t>
+            </a:r>
+          </a:p>
+          <a:p>
+            <a:pPr lvl="1"/>
+            <a:r>
+              <a:rPr lang="en-US" b="0" i="0" dirty="0">
+                <a:solidFill>
+                  <a:srgbClr val="0D0D0D"/>
+                </a:solidFill>
+                <a:effectLst/>
+                <a:latin typeface="KaTeX_Main"/>
+              </a:rPr>
+              <a:t>Area(A)=50×50=2500</a:t>
+            </a:r>
+            <a:endParaRPr lang="en-US" b="0" i="0" dirty="0">
+              <a:solidFill>
+                <a:srgbClr val="0D0D0D"/>
+              </a:solidFill>
+              <a:effectLst/>
+              <a:latin typeface="-apple-system-body"/>
+            </a:endParaRPr>
+          </a:p>
+          <a:p>
+            <a:pPr lvl="1"/>
+            <a:r>
+              <a:rPr lang="en-US" b="0" i="0" dirty="0">
+                <a:solidFill>
+                  <a:srgbClr val="0D0D0D"/>
+                </a:solidFill>
+                <a:effectLst/>
+                <a:latin typeface="KaTeX_Main"/>
+              </a:rPr>
+              <a:t>Area(B)=50×50=2500</a:t>
+            </a:r>
+            <a:endParaRPr lang="en-US" b="0" i="0" dirty="0">
+              <a:solidFill>
+                <a:srgbClr val="0D0D0D"/>
+              </a:solidFill>
+              <a:effectLst/>
+              <a:latin typeface="-apple-system-body"/>
+            </a:endParaRPr>
+          </a:p>
+          <a:p>
+            <a:pPr algn="l"/>
+            <a:r>
+              <a:rPr lang="en-US" b="1" i="0" dirty="0">
+                <a:solidFill>
+                  <a:srgbClr val="0D0D0D"/>
+                </a:solidFill>
+                <a:effectLst/>
+                <a:latin typeface="-apple-system-body"/>
+              </a:rPr>
+              <a:t>Step 1: Calculate the intersection.</a:t>
+            </a:r>
+            <a:endParaRPr lang="en-US" b="0" i="0" dirty="0">
+              <a:solidFill>
+                <a:srgbClr val="0D0D0D"/>
+              </a:solidFill>
+              <a:effectLst/>
+              <a:latin typeface="-apple-system-body"/>
+            </a:endParaRPr>
+          </a:p>
+          <a:p>
+            <a:pPr lvl="1"/>
+            <a:r>
+              <a:rPr lang="en-US" b="0" i="0" dirty="0">
+                <a:solidFill>
+                  <a:srgbClr val="0D0D0D"/>
+                </a:solidFill>
+                <a:effectLst/>
+                <a:latin typeface="-apple-system-body"/>
+              </a:rPr>
+              <a:t>The overlapping region extends from coordinate 20 to 60 on both axes, with width and height both 40</a:t>
+            </a:r>
+          </a:p>
+          <a:p>
+            <a:pPr lvl="1"/>
+            <a:r>
+              <a:rPr lang="en-US" b="0" i="0" dirty="0">
+                <a:solidFill>
+                  <a:srgbClr val="0D0D0D"/>
+                </a:solidFill>
+                <a:effectLst/>
+                <a:latin typeface="KaTeX_Main"/>
+              </a:rPr>
+              <a:t>Intersection=40×40=1600</a:t>
+            </a:r>
+            <a:endParaRPr lang="en-US" b="0" i="0" dirty="0">
+              <a:solidFill>
+                <a:srgbClr val="0D0D0D"/>
+              </a:solidFill>
+              <a:effectLst/>
+              <a:latin typeface="-apple-system-body"/>
+            </a:endParaRPr>
+          </a:p>
+          <a:p>
+            <a:pPr algn="l"/>
+            <a:r>
+              <a:rPr lang="en-US" b="1" i="0" dirty="0">
+                <a:solidFill>
+                  <a:srgbClr val="0D0D0D"/>
+                </a:solidFill>
+                <a:effectLst/>
+                <a:latin typeface="-apple-system-body"/>
+              </a:rPr>
+              <a:t>Step 2: Calculate the union.</a:t>
+            </a:r>
+            <a:endParaRPr lang="en-US" b="0" i="0" dirty="0">
+              <a:solidFill>
+                <a:srgbClr val="0D0D0D"/>
+              </a:solidFill>
+              <a:effectLst/>
+              <a:latin typeface="-apple-system-body"/>
+            </a:endParaRPr>
+          </a:p>
+          <a:p>
+            <a:pPr lvl="1"/>
+            <a:r>
+              <a:rPr lang="en-US" b="0" i="0" dirty="0">
+                <a:solidFill>
+                  <a:srgbClr val="0D0D0D"/>
+                </a:solidFill>
+                <a:effectLst/>
+                <a:latin typeface="-apple-system-body"/>
+              </a:rPr>
+              <a:t>Subtract the overlapping area from the sum of both box areas:</a:t>
+            </a:r>
+          </a:p>
+          <a:p>
+            <a:pPr lvl="1"/>
+            <a:r>
+              <a:rPr lang="en-US" b="0" i="0" dirty="0">
+                <a:solidFill>
+                  <a:srgbClr val="0D0D0D"/>
+                </a:solidFill>
+                <a:effectLst/>
+                <a:latin typeface="KaTeX_Main"/>
+              </a:rPr>
+              <a:t>Union=2500+2500−1600=3400​</a:t>
+            </a:r>
+            <a:endParaRPr lang="en-US" b="0" i="0" dirty="0">
+              <a:solidFill>
+                <a:srgbClr val="0D0D0D"/>
+              </a:solidFill>
+              <a:effectLst/>
+              <a:latin typeface="-apple-system-body"/>
+            </a:endParaRPr>
+          </a:p>
+          <a:p>
+            <a:pPr algn="l"/>
+            <a:r>
+              <a:rPr lang="en-US" b="1" i="0" dirty="0">
+                <a:solidFill>
+                  <a:srgbClr val="0D0D0D"/>
+                </a:solidFill>
+                <a:effectLst/>
+                <a:latin typeface="-apple-system-body"/>
+              </a:rPr>
+              <a:t>Step 3: Calculate </a:t>
+            </a:r>
+            <a:r>
+              <a:rPr lang="en-US" b="1" i="0" dirty="0" err="1">
+                <a:solidFill>
+                  <a:srgbClr val="0D0D0D"/>
+                </a:solidFill>
+                <a:effectLst/>
+                <a:latin typeface="-apple-system-body"/>
+              </a:rPr>
+              <a:t>IoU</a:t>
+            </a:r>
+            <a:r>
+              <a:rPr lang="en-US" b="1" i="0" dirty="0">
+                <a:solidFill>
+                  <a:srgbClr val="0D0D0D"/>
+                </a:solidFill>
+                <a:effectLst/>
+                <a:latin typeface="-apple-system-body"/>
+              </a:rPr>
+              <a:t>.</a:t>
+            </a:r>
+            <a:endParaRPr lang="en-US" b="0" i="0" dirty="0">
+              <a:solidFill>
+                <a:srgbClr val="0D0D0D"/>
+              </a:solidFill>
+              <a:effectLst/>
+              <a:latin typeface="-apple-system-body"/>
+            </a:endParaRPr>
+          </a:p>
+          <a:p>
+            <a:pPr lvl="1"/>
+            <a:r>
+              <a:rPr lang="en-US" b="0" i="0" dirty="0" err="1">
+                <a:solidFill>
+                  <a:srgbClr val="0D0D0D"/>
+                </a:solidFill>
+                <a:effectLst/>
+                <a:latin typeface="KaTeX_Main"/>
+              </a:rPr>
+              <a:t>IoU</a:t>
+            </a:r>
+            <a:r>
+              <a:rPr lang="en-US" b="0" i="0" dirty="0">
+                <a:solidFill>
+                  <a:srgbClr val="0D0D0D"/>
+                </a:solidFill>
+                <a:effectLst/>
+                <a:latin typeface="KaTeX_Main"/>
+              </a:rPr>
+              <a:t>(A,B)=1600/3400≈0.47​</a:t>
+            </a:r>
+            <a:endParaRPr lang="en-US" b="0" i="0" dirty="0">
+              <a:solidFill>
+                <a:srgbClr val="0D0D0D"/>
+              </a:solidFill>
+              <a:effectLst/>
+              <a:latin typeface="-apple-system-body"/>
+            </a:endParaRPr>
+          </a:p>
+          <a:p>
+            <a:pPr algn="l"/>
+            <a:r>
+              <a:rPr lang="en-US" b="0" i="0" dirty="0">
+                <a:solidFill>
+                  <a:srgbClr val="0D0D0D"/>
+                </a:solidFill>
+                <a:effectLst/>
+                <a:latin typeface="-apple-system-body"/>
+              </a:rPr>
+              <a:t>This means the boxes have approximately </a:t>
+            </a:r>
+            <a:r>
+              <a:rPr lang="en-US" b="1" i="0" dirty="0">
+                <a:solidFill>
+                  <a:srgbClr val="0D0D0D"/>
+                </a:solidFill>
+                <a:effectLst/>
+                <a:latin typeface="-apple-system-body"/>
+              </a:rPr>
+              <a:t>47% overlap</a:t>
+            </a:r>
+            <a:r>
+              <a:rPr lang="en-US" b="0" i="0" dirty="0">
+                <a:solidFill>
+                  <a:srgbClr val="0D0D0D"/>
+                </a:solidFill>
+                <a:effectLst/>
+                <a:latin typeface="-apple-system-body"/>
+              </a:rPr>
+              <a:t> relative to their combined area.</a:t>
+            </a:r>
+          </a:p>
+          <a:p>
+            <a:endParaRPr lang="en-US" dirty="0"/>
+          </a:p>
+        </p:txBody>
+      </p:sp>
+    </p:spTree>
+    <p:extLst>
+      <p:ext uri="{BB962C8B-B14F-4D97-AF65-F5344CB8AC3E}">
+        <p14:creationId xmlns:p14="http://schemas.microsoft.com/office/powerpoint/2010/main" val="2507813422"/>
+      </p:ext>
+    </p:extLst>
+  </p:cSld>
+  <p:clrMapOvr>
+    <a:masterClrMapping/>
+  </p:clrMapOvr>
+  <p:transition/>
+</p:sld>
+</file>
+
+<file path=ppt/slides/slide5.xml><?xml version="1.0" encoding="utf-8"?>
+<p:sld xmlns:a="http://schemas.openxmlformats.org/drawingml/2006/main" xmlns:r="http://schemas.openxmlformats.org/officeDocument/2006/relationships" xmlns:p="http://schemas.openxmlformats.org/presentationml/2006/main">
+  <p:cSld>
+    <p:spTree>
+      <p:nvGrpSpPr>
+        <p:cNvPr id="1" name=""/>
+        <p:cNvGrpSpPr/>
+        <p:nvPr/>
+      </p:nvGrpSpPr>
+      <p:grpSpPr>
+        <a:xfrm>
+          <a:off x="0" y="0"/>
+          <a:ext cx="0" cy="0"/>
+          <a:chOff x="0" y="0"/>
+          <a:chExt cx="0" cy="0"/>
+        </a:xfrm>
+      </p:grpSpPr>
+      <p:sp>
+        <p:nvSpPr>
+          <p:cNvPr id="2" name="Title 1">
+            <a:extLst>
+              <a:ext uri="{FF2B5EF4-FFF2-40B4-BE49-F238E27FC236}">
+                <a16:creationId xmlns:a16="http://schemas.microsoft.com/office/drawing/2014/main" id="{37E4FDDA-948F-696D-6583-D65B23351E88}"/>
+              </a:ext>
+            </a:extLst>
+          </p:cNvPr>
+          <p:cNvSpPr>
+            <a:spLocks noGrp="1"/>
+          </p:cNvSpPr>
+          <p:nvPr>
+            <p:ph type="title"/>
+          </p:nvPr>
+        </p:nvSpPr>
+        <p:spPr/>
+        <p:txBody>
+          <a:bodyPr/>
+          <a:lstStyle/>
+          <a:p>
+            <a:r>
+              <a:rPr lang="en-US" altLang="zh-CN" dirty="0"/>
+              <a:t>Next Slides are not covered in Midterm</a:t>
+            </a:r>
+            <a:endParaRPr lang="zh-CN" altLang="en-US" dirty="0"/>
+          </a:p>
+        </p:txBody>
+      </p:sp>
+      <p:sp>
+        <p:nvSpPr>
+          <p:cNvPr id="3" name="Content Placeholder 2">
+            <a:extLst>
+              <a:ext uri="{FF2B5EF4-FFF2-40B4-BE49-F238E27FC236}">
+                <a16:creationId xmlns:a16="http://schemas.microsoft.com/office/drawing/2014/main" id="{60E4A5B0-EA13-AD85-73ED-73059701D81D}"/>
+              </a:ext>
+            </a:extLst>
+          </p:cNvPr>
+          <p:cNvSpPr>
+            <a:spLocks noGrp="1"/>
+          </p:cNvSpPr>
+          <p:nvPr>
+            <p:ph idx="1"/>
+          </p:nvPr>
+        </p:nvSpPr>
+        <p:spPr/>
+        <p:txBody>
+          <a:bodyPr/>
+          <a:lstStyle/>
+          <a:p>
+            <a:endParaRPr lang="zh-CN" altLang="en-US"/>
+          </a:p>
+        </p:txBody>
+      </p:sp>
+    </p:spTree>
+    <p:extLst>
+      <p:ext uri="{BB962C8B-B14F-4D97-AF65-F5344CB8AC3E}">
+        <p14:creationId xmlns:p14="http://schemas.microsoft.com/office/powerpoint/2010/main" val="1437961075"/>
+      </p:ext>
+    </p:extLst>
+  </p:cSld>
+  <p:clrMapOvr>
+    <a:masterClrMapping/>
+  </p:clrMapOvr>
+  <p:transition/>
+</p:sld>
+</file>
+
+<file path=ppt/slides/slide6.xml><?xml version="1.0" encoding="utf-8"?>
+<p:sld xmlns:a="http://schemas.openxmlformats.org/drawingml/2006/main" xmlns:r="http://schemas.openxmlformats.org/officeDocument/2006/relationships" xmlns:p="http://schemas.openxmlformats.org/presentationml/2006/main">
+  <p:cSld>
+    <p:spTree>
+      <p:nvGrpSpPr>
+        <p:cNvPr id="1" name=""/>
+        <p:cNvGrpSpPr/>
+        <p:nvPr/>
+      </p:nvGrpSpPr>
+      <p:grpSpPr>
+        <a:xfrm>
+          <a:off x="0" y="0"/>
+          <a:ext cx="0" cy="0"/>
+          <a:chOff x="0" y="0"/>
+          <a:chExt cx="0" cy="0"/>
+        </a:xfrm>
+      </p:grpSpPr>
       <p:sp>
         <p:nvSpPr>
           <p:cNvPr id="2" name="Title 1"/>
@@ -7916,19 +9465,43 @@
         <a:graphic>
           <a:graphicData uri="http://schemas.openxmlformats.org/drawingml/2006/table">
             <a:tbl>
-              <a:tblPr firstRow="1" bandRow="0">
+              <a:tblPr firstRow="1">
                 <a:tableStyleId>{5940675A-B579-460E-94D1-54222C63F5DA}</a:tableStyleId>
               </a:tblPr>
               <a:tblGrid>
-                <a:gridCol w="1000000"/>
-                <a:gridCol w="1300000"/>
-                <a:gridCol w="1700000"/>
-                <a:gridCol w="1500000"/>
+                <a:gridCol w="1000000">
+                  <a:extLst>
+                    <a:ext uri="{9D8B030D-6E8A-4147-A177-3AD203B41FA5}">
+                      <a16:colId xmlns:a16="http://schemas.microsoft.com/office/drawing/2014/main" val="20000"/>
+                    </a:ext>
+                  </a:extLst>
+                </a:gridCol>
+                <a:gridCol w="1300000">
+                  <a:extLst>
+                    <a:ext uri="{9D8B030D-6E8A-4147-A177-3AD203B41FA5}">
+                      <a16:colId xmlns:a16="http://schemas.microsoft.com/office/drawing/2014/main" val="20001"/>
+                    </a:ext>
+                  </a:extLst>
+                </a:gridCol>
+                <a:gridCol w="1700000">
+                  <a:extLst>
+                    <a:ext uri="{9D8B030D-6E8A-4147-A177-3AD203B41FA5}">
+                      <a16:colId xmlns:a16="http://schemas.microsoft.com/office/drawing/2014/main" val="20002"/>
+                    </a:ext>
+                  </a:extLst>
+                </a:gridCol>
+                <a:gridCol w="1500000">
+                  <a:extLst>
+                    <a:ext uri="{9D8B030D-6E8A-4147-A177-3AD203B41FA5}">
+                      <a16:colId xmlns:a16="http://schemas.microsoft.com/office/drawing/2014/main" val="20003"/>
+                    </a:ext>
+                  </a:extLst>
+                </a:gridCol>
               </a:tblGrid>
               <a:tr h="560000">
                 <a:tc>
                   <a:txBody>
-                    <a:bodyPr wrap="square"/>
+                    <a:bodyPr/>
                     <a:lstStyle/>
                     <a:p>
                       <a:pPr algn="ctr"/>
@@ -7946,7 +9519,7 @@
                 </a:tc>
                 <a:tc>
                   <a:txBody>
-                    <a:bodyPr wrap="square"/>
+                    <a:bodyPr/>
                     <a:lstStyle/>
                     <a:p>
                       <a:pPr algn="ctr"/>
@@ -7964,7 +9537,7 @@
                 </a:tc>
                 <a:tc>
                   <a:txBody>
-                    <a:bodyPr wrap="square"/>
+                    <a:bodyPr/>
                     <a:lstStyle/>
                     <a:p>
                       <a:pPr algn="ctr"/>
@@ -7982,7 +9555,7 @@
                 </a:tc>
                 <a:tc>
                   <a:txBody>
-                    <a:bodyPr wrap="square"/>
+                    <a:bodyPr/>
                     <a:lstStyle/>
                     <a:p>
                       <a:pPr algn="ctr"/>
@@ -7998,11 +9571,16 @@
                     </a:solidFill>
                   </a:tcPr>
                 </a:tc>
+                <a:extLst>
+                  <a:ext uri="{0D108BD9-81ED-4DB2-BD59-A6C34878D82A}">
+                    <a16:rowId xmlns:a16="http://schemas.microsoft.com/office/drawing/2014/main" val="10000"/>
+                  </a:ext>
+                </a:extLst>
               </a:tr>
               <a:tr h="560000">
                 <a:tc>
                   <a:txBody>
-                    <a:bodyPr wrap="square"/>
+                    <a:bodyPr/>
                     <a:lstStyle/>
                     <a:p>
                       <a:pPr algn="ctr"/>
@@ -8016,7 +9594,7 @@
                 </a:tc>
                 <a:tc>
                   <a:txBody>
-                    <a:bodyPr wrap="square"/>
+                    <a:bodyPr/>
                     <a:lstStyle/>
                     <a:p>
                       <a:pPr algn="ctr"/>
@@ -8030,7 +9608,7 @@
                 </a:tc>
                 <a:tc>
                   <a:txBody>
-                    <a:bodyPr wrap="square"/>
+                    <a:bodyPr/>
                     <a:lstStyle/>
                     <a:p>
                       <a:pPr algn="ctr"/>
@@ -8041,7 +9619,7 @@
                 </a:tc>
                 <a:tc>
                   <a:txBody>
-                    <a:bodyPr wrap="square"/>
+                    <a:bodyPr/>
                     <a:lstStyle/>
                     <a:p>
                       <a:pPr algn="ctr"/>
@@ -8050,11 +9628,16 @@
                   </a:txBody>
                   <a:tcPr marL="60000" marR="60000" marT="25000" marB="25000" anchor="ctr"/>
                 </a:tc>
+                <a:extLst>
+                  <a:ext uri="{0D108BD9-81ED-4DB2-BD59-A6C34878D82A}">
+                    <a16:rowId xmlns:a16="http://schemas.microsoft.com/office/drawing/2014/main" val="10001"/>
+                  </a:ext>
+                </a:extLst>
               </a:tr>
               <a:tr h="560000">
                 <a:tc>
                   <a:txBody>
-                    <a:bodyPr wrap="square"/>
+                    <a:bodyPr/>
                     <a:lstStyle/>
                     <a:p>
                       <a:pPr algn="ctr"/>
@@ -8068,7 +9651,7 @@
                 </a:tc>
                 <a:tc>
                   <a:txBody>
-                    <a:bodyPr wrap="square"/>
+                    <a:bodyPr/>
                     <a:lstStyle/>
                     <a:p>
                       <a:pPr algn="ctr"/>
@@ -8082,7 +9665,7 @@
                 </a:tc>
                 <a:tc>
                   <a:txBody>
-                    <a:bodyPr wrap="square"/>
+                    <a:bodyPr/>
                     <a:lstStyle/>
                     <a:p>
                       <a:pPr algn="ctr"/>
@@ -8093,7 +9676,7 @@
                 </a:tc>
                 <a:tc>
                   <a:txBody>
-                    <a:bodyPr wrap="square"/>
+                    <a:bodyPr/>
                     <a:lstStyle/>
                     <a:p>
                       <a:pPr algn="ctr"/>
@@ -8102,11 +9685,16 @@
                   </a:txBody>
                   <a:tcPr marL="60000" marR="60000" marT="25000" marB="25000" anchor="ctr"/>
                 </a:tc>
+                <a:extLst>
+                  <a:ext uri="{0D108BD9-81ED-4DB2-BD59-A6C34878D82A}">
+                    <a16:rowId xmlns:a16="http://schemas.microsoft.com/office/drawing/2014/main" val="10002"/>
+                  </a:ext>
+                </a:extLst>
               </a:tr>
               <a:tr h="560000">
                 <a:tc>
                   <a:txBody>
-                    <a:bodyPr wrap="square"/>
+                    <a:bodyPr/>
                     <a:lstStyle/>
                     <a:p>
                       <a:pPr algn="ctr"/>
@@ -8120,7 +9708,7 @@
                 </a:tc>
                 <a:tc>
                   <a:txBody>
-                    <a:bodyPr wrap="square"/>
+                    <a:bodyPr/>
                     <a:lstStyle/>
                     <a:p>
                       <a:pPr algn="ctr"/>
@@ -8134,7 +9722,7 @@
                 </a:tc>
                 <a:tc>
                   <a:txBody>
-                    <a:bodyPr wrap="square"/>
+                    <a:bodyPr/>
                     <a:lstStyle/>
                     <a:p>
                       <a:pPr algn="ctr"/>
@@ -8145,7 +9733,7 @@
                 </a:tc>
                 <a:tc>
                   <a:txBody>
-                    <a:bodyPr wrap="square"/>
+                    <a:bodyPr/>
                     <a:lstStyle/>
                     <a:p>
                       <a:pPr algn="ctr"/>
@@ -8154,11 +9742,16 @@
                   </a:txBody>
                   <a:tcPr marL="60000" marR="60000" marT="25000" marB="25000" anchor="ctr"/>
                 </a:tc>
+                <a:extLst>
+                  <a:ext uri="{0D108BD9-81ED-4DB2-BD59-A6C34878D82A}">
+                    <a16:rowId xmlns:a16="http://schemas.microsoft.com/office/drawing/2014/main" val="10003"/>
+                  </a:ext>
+                </a:extLst>
               </a:tr>
               <a:tr h="560000">
                 <a:tc>
                   <a:txBody>
-                    <a:bodyPr wrap="square"/>
+                    <a:bodyPr/>
                     <a:lstStyle/>
                     <a:p>
                       <a:pPr algn="ctr"/>
@@ -8172,7 +9765,7 @@
                 </a:tc>
                 <a:tc>
                   <a:txBody>
-                    <a:bodyPr wrap="square"/>
+                    <a:bodyPr/>
                     <a:lstStyle/>
                     <a:p>
                       <a:pPr algn="ctr"/>
@@ -8186,7 +9779,7 @@
                 </a:tc>
                 <a:tc>
                   <a:txBody>
-                    <a:bodyPr wrap="square"/>
+                    <a:bodyPr/>
                     <a:lstStyle/>
                     <a:p>
                       <a:pPr algn="ctr"/>
@@ -8197,7 +9790,7 @@
                 </a:tc>
                 <a:tc>
                   <a:txBody>
-                    <a:bodyPr wrap="square"/>
+                    <a:bodyPr/>
                     <a:lstStyle/>
                     <a:p>
                       <a:pPr algn="ctr"/>
@@ -8206,11 +9799,16 @@
                   </a:txBody>
                   <a:tcPr marL="60000" marR="60000" marT="25000" marB="25000" anchor="ctr"/>
                 </a:tc>
+                <a:extLst>
+                  <a:ext uri="{0D108BD9-81ED-4DB2-BD59-A6C34878D82A}">
+                    <a16:rowId xmlns:a16="http://schemas.microsoft.com/office/drawing/2014/main" val="10004"/>
+                  </a:ext>
+                </a:extLst>
               </a:tr>
               <a:tr h="560000">
                 <a:tc>
                   <a:txBody>
-                    <a:bodyPr wrap="square"/>
+                    <a:bodyPr/>
                     <a:lstStyle/>
                     <a:p>
                       <a:pPr algn="ctr"/>
@@ -8224,7 +9822,7 @@
                 </a:tc>
                 <a:tc>
                   <a:txBody>
-                    <a:bodyPr wrap="square"/>
+                    <a:bodyPr/>
                     <a:lstStyle/>
                     <a:p>
                       <a:pPr algn="ctr"/>
@@ -8238,7 +9836,7 @@
                 </a:tc>
                 <a:tc>
                   <a:txBody>
-                    <a:bodyPr wrap="square"/>
+                    <a:bodyPr/>
                     <a:lstStyle/>
                     <a:p>
                       <a:pPr algn="ctr"/>
@@ -8249,7 +9847,7 @@
                 </a:tc>
                 <a:tc>
                   <a:txBody>
-                    <a:bodyPr wrap="square"/>
+                    <a:bodyPr/>
                     <a:lstStyle/>
                     <a:p>
                       <a:pPr algn="ctr"/>
@@ -8258,11 +9856,16 @@
                   </a:txBody>
                   <a:tcPr marL="60000" marR="60000" marT="25000" marB="25000" anchor="ctr"/>
                 </a:tc>
+                <a:extLst>
+                  <a:ext uri="{0D108BD9-81ED-4DB2-BD59-A6C34878D82A}">
+                    <a16:rowId xmlns:a16="http://schemas.microsoft.com/office/drawing/2014/main" val="10005"/>
+                  </a:ext>
+                </a:extLst>
               </a:tr>
               <a:tr h="560000">
                 <a:tc>
                   <a:txBody>
-                    <a:bodyPr wrap="square"/>
+                    <a:bodyPr/>
                     <a:lstStyle/>
                     <a:p>
                       <a:pPr algn="ctr"/>
@@ -8276,7 +9879,7 @@
                 </a:tc>
                 <a:tc>
                   <a:txBody>
-                    <a:bodyPr wrap="square"/>
+                    <a:bodyPr/>
                     <a:lstStyle/>
                     <a:p>
                       <a:pPr algn="ctr"/>
@@ -8290,7 +9893,7 @@
                 </a:tc>
                 <a:tc>
                   <a:txBody>
-                    <a:bodyPr wrap="square"/>
+                    <a:bodyPr/>
                     <a:lstStyle/>
                     <a:p>
                       <a:pPr algn="ctr"/>
@@ -8301,7 +9904,7 @@
                 </a:tc>
                 <a:tc>
                   <a:txBody>
-                    <a:bodyPr wrap="square"/>
+                    <a:bodyPr/>
                     <a:lstStyle/>
                     <a:p>
                       <a:pPr algn="ctr"/>
@@ -8310,6 +9913,11 @@
                   </a:txBody>
                   <a:tcPr marL="60000" marR="60000" marT="25000" marB="25000" anchor="ctr"/>
                 </a:tc>
+                <a:extLst>
+                  <a:ext uri="{0D108BD9-81ED-4DB2-BD59-A6C34878D82A}">
+                    <a16:rowId xmlns:a16="http://schemas.microsoft.com/office/drawing/2014/main" val="10006"/>
+                  </a:ext>
+                </a:extLst>
               </a:tr>
             </a:tbl>
           </a:graphicData>
@@ -8323,8 +9931,8 @@
 </p:sld>
 </file>
 
-<file path=ppt/slides/slide5.xml><?xml version="1.0" encoding="utf-8"?>
-<p:sld xmlns:a="http://schemas.openxmlformats.org/drawingml/2006/main" xmlns:p="http://schemas.openxmlformats.org/presentationml/2006/main" xmlns:r="http://schemas.openxmlformats.org/officeDocument/2006/relationships">
+<file path=ppt/slides/slide7.xml><?xml version="1.0" encoding="utf-8"?>
+<p:sld xmlns:a="http://schemas.openxmlformats.org/drawingml/2006/main" xmlns:r="http://schemas.openxmlformats.org/officeDocument/2006/relationships" xmlns:p="http://schemas.openxmlformats.org/presentationml/2006/main">
   <p:cSld>
     <p:spTree>
       <p:nvGrpSpPr>
@@ -8332,7 +9940,14 @@
         <p:cNvGrpSpPr/>
         <p:nvPr/>
       </p:nvGrpSpPr>
-      <p:grpSpPr/>
+      <p:grpSpPr>
+        <a:xfrm>
+          <a:off x="0" y="0"/>
+          <a:ext cx="0" cy="0"/>
+          <a:chOff x="0" y="0"/>
+          <a:chExt cx="0" cy="0"/>
+        </a:xfrm>
+      </p:grpSpPr>
       <p:sp>
         <p:nvSpPr>
           <p:cNvPr id="2" name="Title 1"/>
@@ -8425,19 +10040,43 @@
         <a:graphic>
           <a:graphicData uri="http://schemas.openxmlformats.org/drawingml/2006/table">
             <a:tbl>
-              <a:tblPr firstRow="1" bandRow="0">
+              <a:tblPr firstRow="1">
                 <a:tableStyleId>{5940675A-B579-460E-94D1-54222C63F5DA}</a:tableStyleId>
               </a:tblPr>
               <a:tblGrid>
-                <a:gridCol w="1000000"/>
-                <a:gridCol w="1300000"/>
-                <a:gridCol w="1700000"/>
-                <a:gridCol w="1500000"/>
+                <a:gridCol w="1000000">
+                  <a:extLst>
+                    <a:ext uri="{9D8B030D-6E8A-4147-A177-3AD203B41FA5}">
+                      <a16:colId xmlns:a16="http://schemas.microsoft.com/office/drawing/2014/main" val="20000"/>
+                    </a:ext>
+                  </a:extLst>
+                </a:gridCol>
+                <a:gridCol w="1300000">
+                  <a:extLst>
+                    <a:ext uri="{9D8B030D-6E8A-4147-A177-3AD203B41FA5}">
+                      <a16:colId xmlns:a16="http://schemas.microsoft.com/office/drawing/2014/main" val="20001"/>
+                    </a:ext>
+                  </a:extLst>
+                </a:gridCol>
+                <a:gridCol w="1700000">
+                  <a:extLst>
+                    <a:ext uri="{9D8B030D-6E8A-4147-A177-3AD203B41FA5}">
+                      <a16:colId xmlns:a16="http://schemas.microsoft.com/office/drawing/2014/main" val="20002"/>
+                    </a:ext>
+                  </a:extLst>
+                </a:gridCol>
+                <a:gridCol w="1500000">
+                  <a:extLst>
+                    <a:ext uri="{9D8B030D-6E8A-4147-A177-3AD203B41FA5}">
+                      <a16:colId xmlns:a16="http://schemas.microsoft.com/office/drawing/2014/main" val="20003"/>
+                    </a:ext>
+                  </a:extLst>
+                </a:gridCol>
               </a:tblGrid>
               <a:tr h="560000">
                 <a:tc>
                   <a:txBody>
-                    <a:bodyPr wrap="square"/>
+                    <a:bodyPr/>
                     <a:lstStyle/>
                     <a:p>
                       <a:pPr algn="ctr"/>
@@ -8455,7 +10094,7 @@
                 </a:tc>
                 <a:tc>
                   <a:txBody>
-                    <a:bodyPr wrap="square"/>
+                    <a:bodyPr/>
                     <a:lstStyle/>
                     <a:p>
                       <a:pPr algn="ctr"/>
@@ -8473,7 +10112,7 @@
                 </a:tc>
                 <a:tc>
                   <a:txBody>
-                    <a:bodyPr wrap="square"/>
+                    <a:bodyPr/>
                     <a:lstStyle/>
                     <a:p>
                       <a:pPr algn="ctr"/>
@@ -8491,7 +10130,7 @@
                 </a:tc>
                 <a:tc>
                   <a:txBody>
-                    <a:bodyPr wrap="square"/>
+                    <a:bodyPr/>
                     <a:lstStyle/>
                     <a:p>
                       <a:pPr algn="ctr"/>
@@ -8507,11 +10146,16 @@
                     </a:solidFill>
                   </a:tcPr>
                 </a:tc>
+                <a:extLst>
+                  <a:ext uri="{0D108BD9-81ED-4DB2-BD59-A6C34878D82A}">
+                    <a16:rowId xmlns:a16="http://schemas.microsoft.com/office/drawing/2014/main" val="10000"/>
+                  </a:ext>
+                </a:extLst>
               </a:tr>
               <a:tr h="560000">
                 <a:tc>
                   <a:txBody>
-                    <a:bodyPr wrap="square"/>
+                    <a:bodyPr/>
                     <a:lstStyle/>
                     <a:p>
                       <a:pPr algn="ctr"/>
@@ -8525,7 +10169,7 @@
                 </a:tc>
                 <a:tc>
                   <a:txBody>
-                    <a:bodyPr wrap="square"/>
+                    <a:bodyPr/>
                     <a:lstStyle/>
                     <a:p>
                       <a:pPr algn="ctr"/>
@@ -8539,7 +10183,7 @@
                 </a:tc>
                 <a:tc>
                   <a:txBody>
-                    <a:bodyPr wrap="square"/>
+                    <a:bodyPr/>
                     <a:lstStyle/>
                     <a:p>
                       <a:pPr algn="ctr"/>
@@ -8557,7 +10201,7 @@
                 </a:tc>
                 <a:tc>
                   <a:txBody>
-                    <a:bodyPr wrap="square"/>
+                    <a:bodyPr/>
                     <a:lstStyle/>
                     <a:p>
                       <a:pPr algn="ctr"/>
@@ -8573,11 +10217,16 @@
                   </a:txBody>
                   <a:tcPr marL="60000" marR="60000" marT="25000" marB="25000" anchor="ctr"/>
                 </a:tc>
+                <a:extLst>
+                  <a:ext uri="{0D108BD9-81ED-4DB2-BD59-A6C34878D82A}">
+                    <a16:rowId xmlns:a16="http://schemas.microsoft.com/office/drawing/2014/main" val="10001"/>
+                  </a:ext>
+                </a:extLst>
               </a:tr>
               <a:tr h="560000">
                 <a:tc>
                   <a:txBody>
-                    <a:bodyPr wrap="square"/>
+                    <a:bodyPr/>
                     <a:lstStyle/>
                     <a:p>
                       <a:pPr algn="ctr"/>
@@ -8591,7 +10240,7 @@
                 </a:tc>
                 <a:tc>
                   <a:txBody>
-                    <a:bodyPr wrap="square"/>
+                    <a:bodyPr/>
                     <a:lstStyle/>
                     <a:p>
                       <a:pPr algn="ctr"/>
@@ -8605,7 +10254,7 @@
                 </a:tc>
                 <a:tc>
                   <a:txBody>
-                    <a:bodyPr wrap="square"/>
+                    <a:bodyPr/>
                     <a:lstStyle/>
                     <a:p>
                       <a:pPr algn="ctr"/>
@@ -8623,7 +10272,7 @@
                 </a:tc>
                 <a:tc>
                   <a:txBody>
-                    <a:bodyPr wrap="square"/>
+                    <a:bodyPr/>
                     <a:lstStyle/>
                     <a:p>
                       <a:pPr algn="ctr"/>
@@ -8639,11 +10288,16 @@
                   </a:txBody>
                   <a:tcPr marL="60000" marR="60000" marT="25000" marB="25000" anchor="ctr"/>
                 </a:tc>
+                <a:extLst>
+                  <a:ext uri="{0D108BD9-81ED-4DB2-BD59-A6C34878D82A}">
+                    <a16:rowId xmlns:a16="http://schemas.microsoft.com/office/drawing/2014/main" val="10002"/>
+                  </a:ext>
+                </a:extLst>
               </a:tr>
               <a:tr h="560000">
                 <a:tc>
                   <a:txBody>
-                    <a:bodyPr wrap="square"/>
+                    <a:bodyPr/>
                     <a:lstStyle/>
                     <a:p>
                       <a:pPr algn="ctr"/>
@@ -8657,7 +10311,7 @@
                 </a:tc>
                 <a:tc>
                   <a:txBody>
-                    <a:bodyPr wrap="square"/>
+                    <a:bodyPr/>
                     <a:lstStyle/>
                     <a:p>
                       <a:pPr algn="ctr"/>
@@ -8671,7 +10325,7 @@
                 </a:tc>
                 <a:tc>
                   <a:txBody>
-                    <a:bodyPr wrap="square"/>
+                    <a:bodyPr/>
                     <a:lstStyle/>
                     <a:p>
                       <a:pPr algn="ctr"/>
@@ -8689,7 +10343,7 @@
                 </a:tc>
                 <a:tc>
                   <a:txBody>
-                    <a:bodyPr wrap="square"/>
+                    <a:bodyPr/>
                     <a:lstStyle/>
                     <a:p>
                       <a:pPr algn="ctr"/>
@@ -8705,11 +10359,16 @@
                   </a:txBody>
                   <a:tcPr marL="60000" marR="60000" marT="25000" marB="25000" anchor="ctr"/>
                 </a:tc>
+                <a:extLst>
+                  <a:ext uri="{0D108BD9-81ED-4DB2-BD59-A6C34878D82A}">
+                    <a16:rowId xmlns:a16="http://schemas.microsoft.com/office/drawing/2014/main" val="10003"/>
+                  </a:ext>
+                </a:extLst>
               </a:tr>
               <a:tr h="560000">
                 <a:tc>
                   <a:txBody>
-                    <a:bodyPr wrap="square"/>
+                    <a:bodyPr/>
                     <a:lstStyle/>
                     <a:p>
                       <a:pPr algn="ctr"/>
@@ -8723,7 +10382,7 @@
                 </a:tc>
                 <a:tc>
                   <a:txBody>
-                    <a:bodyPr wrap="square"/>
+                    <a:bodyPr/>
                     <a:lstStyle/>
                     <a:p>
                       <a:pPr algn="ctr"/>
@@ -8737,7 +10396,7 @@
                 </a:tc>
                 <a:tc>
                   <a:txBody>
-                    <a:bodyPr wrap="square"/>
+                    <a:bodyPr/>
                     <a:lstStyle/>
                     <a:p>
                       <a:pPr algn="ctr"/>
@@ -8755,7 +10414,7 @@
                 </a:tc>
                 <a:tc>
                   <a:txBody>
-                    <a:bodyPr wrap="square"/>
+                    <a:bodyPr/>
                     <a:lstStyle/>
                     <a:p>
                       <a:pPr algn="ctr"/>
@@ -8771,11 +10430,16 @@
                   </a:txBody>
                   <a:tcPr marL="60000" marR="60000" marT="25000" marB="25000" anchor="ctr"/>
                 </a:tc>
+                <a:extLst>
+                  <a:ext uri="{0D108BD9-81ED-4DB2-BD59-A6C34878D82A}">
+                    <a16:rowId xmlns:a16="http://schemas.microsoft.com/office/drawing/2014/main" val="10004"/>
+                  </a:ext>
+                </a:extLst>
               </a:tr>
               <a:tr h="560000">
                 <a:tc>
                   <a:txBody>
-                    <a:bodyPr wrap="square"/>
+                    <a:bodyPr/>
                     <a:lstStyle/>
                     <a:p>
                       <a:pPr algn="ctr"/>
@@ -8789,7 +10453,7 @@
                 </a:tc>
                 <a:tc>
                   <a:txBody>
-                    <a:bodyPr wrap="square"/>
+                    <a:bodyPr/>
                     <a:lstStyle/>
                     <a:p>
                       <a:pPr algn="ctr"/>
@@ -8803,7 +10467,7 @@
                 </a:tc>
                 <a:tc>
                   <a:txBody>
-                    <a:bodyPr wrap="square"/>
+                    <a:bodyPr/>
                     <a:lstStyle/>
                     <a:p>
                       <a:pPr algn="ctr"/>
@@ -8821,7 +10485,7 @@
                 </a:tc>
                 <a:tc>
                   <a:txBody>
-                    <a:bodyPr wrap="square"/>
+                    <a:bodyPr/>
                     <a:lstStyle/>
                     <a:p>
                       <a:pPr algn="ctr"/>
@@ -8837,11 +10501,16 @@
                   </a:txBody>
                   <a:tcPr marL="60000" marR="60000" marT="25000" marB="25000" anchor="ctr"/>
                 </a:tc>
+                <a:extLst>
+                  <a:ext uri="{0D108BD9-81ED-4DB2-BD59-A6C34878D82A}">
+                    <a16:rowId xmlns:a16="http://schemas.microsoft.com/office/drawing/2014/main" val="10005"/>
+                  </a:ext>
+                </a:extLst>
               </a:tr>
               <a:tr h="560000">
                 <a:tc>
                   <a:txBody>
-                    <a:bodyPr wrap="square"/>
+                    <a:bodyPr/>
                     <a:lstStyle/>
                     <a:p>
                       <a:pPr algn="ctr"/>
@@ -8855,7 +10524,7 @@
                 </a:tc>
                 <a:tc>
                   <a:txBody>
-                    <a:bodyPr wrap="square"/>
+                    <a:bodyPr/>
                     <a:lstStyle/>
                     <a:p>
                       <a:pPr algn="ctr"/>
@@ -8869,7 +10538,7 @@
                 </a:tc>
                 <a:tc>
                   <a:txBody>
-                    <a:bodyPr wrap="square"/>
+                    <a:bodyPr/>
                     <a:lstStyle/>
                     <a:p>
                       <a:pPr algn="ctr"/>
@@ -8887,7 +10556,7 @@
                 </a:tc>
                 <a:tc>
                   <a:txBody>
-                    <a:bodyPr wrap="square"/>
+                    <a:bodyPr/>
                     <a:lstStyle/>
                     <a:p>
                       <a:pPr algn="ctr"/>
@@ -8903,6 +10572,11 @@
                   </a:txBody>
                   <a:tcPr marL="60000" marR="60000" marT="25000" marB="25000" anchor="ctr"/>
                 </a:tc>
+                <a:extLst>
+                  <a:ext uri="{0D108BD9-81ED-4DB2-BD59-A6C34878D82A}">
+                    <a16:rowId xmlns:a16="http://schemas.microsoft.com/office/drawing/2014/main" val="10006"/>
+                  </a:ext>
+                </a:extLst>
               </a:tr>
             </a:tbl>
           </a:graphicData>
@@ -8916,8 +10590,8 @@
 </p:sld>
 </file>
 
-<file path=ppt/slides/slide6.xml><?xml version="1.0" encoding="utf-8"?>
-<p:sld xmlns:a="http://schemas.openxmlformats.org/drawingml/2006/main" xmlns:p="http://schemas.openxmlformats.org/presentationml/2006/main" xmlns:r="http://schemas.openxmlformats.org/officeDocument/2006/relationships">
+<file path=ppt/slides/slide8.xml><?xml version="1.0" encoding="utf-8"?>
+<p:sld xmlns:a="http://schemas.openxmlformats.org/drawingml/2006/main" xmlns:r="http://schemas.openxmlformats.org/officeDocument/2006/relationships" xmlns:p="http://schemas.openxmlformats.org/presentationml/2006/main">
   <p:cSld>
     <p:spTree>
       <p:nvGrpSpPr>
@@ -8925,7 +10599,14 @@
         <p:cNvGrpSpPr/>
         <p:nvPr/>
       </p:nvGrpSpPr>
-      <p:grpSpPr/>
+      <p:grpSpPr>
+        <a:xfrm>
+          <a:off x="0" y="0"/>
+          <a:ext cx="0" cy="0"/>
+          <a:chOff x="0" y="0"/>
+          <a:chExt cx="0" cy="0"/>
+        </a:xfrm>
+      </p:grpSpPr>
       <p:sp>
         <p:nvSpPr>
           <p:cNvPr id="2" name="Title 1"/>
@@ -9081,23 +10762,71 @@
         <a:graphic>
           <a:graphicData uri="http://schemas.openxmlformats.org/drawingml/2006/table">
             <a:tbl>
-              <a:tblPr firstRow="1" bandRow="0">
+              <a:tblPr firstRow="1">
                 <a:tableStyleId>{5940675A-B579-460E-94D1-54222C63F5DA}</a:tableStyleId>
               </a:tblPr>
               <a:tblGrid>
-                <a:gridCol w="900000"/>
-                <a:gridCol w="900000"/>
-                <a:gridCol w="900000"/>
-                <a:gridCol w="900000"/>
-                <a:gridCol w="900000"/>
-                <a:gridCol w="900000"/>
-                <a:gridCol w="900000"/>
-                <a:gridCol w="900000"/>
+                <a:gridCol w="900000">
+                  <a:extLst>
+                    <a:ext uri="{9D8B030D-6E8A-4147-A177-3AD203B41FA5}">
+                      <a16:colId xmlns:a16="http://schemas.microsoft.com/office/drawing/2014/main" val="20000"/>
+                    </a:ext>
+                  </a:extLst>
+                </a:gridCol>
+                <a:gridCol w="900000">
+                  <a:extLst>
+                    <a:ext uri="{9D8B030D-6E8A-4147-A177-3AD203B41FA5}">
+                      <a16:colId xmlns:a16="http://schemas.microsoft.com/office/drawing/2014/main" val="20001"/>
+                    </a:ext>
+                  </a:extLst>
+                </a:gridCol>
+                <a:gridCol w="900000">
+                  <a:extLst>
+                    <a:ext uri="{9D8B030D-6E8A-4147-A177-3AD203B41FA5}">
+                      <a16:colId xmlns:a16="http://schemas.microsoft.com/office/drawing/2014/main" val="20002"/>
+                    </a:ext>
+                  </a:extLst>
+                </a:gridCol>
+                <a:gridCol w="900000">
+                  <a:extLst>
+                    <a:ext uri="{9D8B030D-6E8A-4147-A177-3AD203B41FA5}">
+                      <a16:colId xmlns:a16="http://schemas.microsoft.com/office/drawing/2014/main" val="20003"/>
+                    </a:ext>
+                  </a:extLst>
+                </a:gridCol>
+                <a:gridCol w="900000">
+                  <a:extLst>
+                    <a:ext uri="{9D8B030D-6E8A-4147-A177-3AD203B41FA5}">
+                      <a16:colId xmlns:a16="http://schemas.microsoft.com/office/drawing/2014/main" val="20004"/>
+                    </a:ext>
+                  </a:extLst>
+                </a:gridCol>
+                <a:gridCol w="900000">
+                  <a:extLst>
+                    <a:ext uri="{9D8B030D-6E8A-4147-A177-3AD203B41FA5}">
+                      <a16:colId xmlns:a16="http://schemas.microsoft.com/office/drawing/2014/main" val="20005"/>
+                    </a:ext>
+                  </a:extLst>
+                </a:gridCol>
+                <a:gridCol w="900000">
+                  <a:extLst>
+                    <a:ext uri="{9D8B030D-6E8A-4147-A177-3AD203B41FA5}">
+                      <a16:colId xmlns:a16="http://schemas.microsoft.com/office/drawing/2014/main" val="20006"/>
+                    </a:ext>
+                  </a:extLst>
+                </a:gridCol>
+                <a:gridCol w="900000">
+                  <a:extLst>
+                    <a:ext uri="{9D8B030D-6E8A-4147-A177-3AD203B41FA5}">
+                      <a16:colId xmlns:a16="http://schemas.microsoft.com/office/drawing/2014/main" val="20007"/>
+                    </a:ext>
+                  </a:extLst>
+                </a:gridCol>
               </a:tblGrid>
               <a:tr h="560000">
                 <a:tc>
                   <a:txBody>
-                    <a:bodyPr wrap="square"/>
+                    <a:bodyPr/>
                     <a:lstStyle/>
                     <a:p>
                       <a:pPr algn="ctr"/>
@@ -9115,7 +10844,7 @@
                 </a:tc>
                 <a:tc>
                   <a:txBody>
-                    <a:bodyPr wrap="square"/>
+                    <a:bodyPr/>
                     <a:lstStyle/>
                     <a:p>
                       <a:pPr algn="ctr"/>
@@ -9133,7 +10862,7 @@
                 </a:tc>
                 <a:tc>
                   <a:txBody>
-                    <a:bodyPr wrap="square"/>
+                    <a:bodyPr/>
                     <a:lstStyle/>
                     <a:p>
                       <a:pPr algn="ctr"/>
@@ -9151,7 +10880,7 @@
                 </a:tc>
                 <a:tc>
                   <a:txBody>
-                    <a:bodyPr wrap="square"/>
+                    <a:bodyPr/>
                     <a:lstStyle/>
                     <a:p>
                       <a:pPr algn="ctr"/>
@@ -9169,7 +10898,7 @@
                 </a:tc>
                 <a:tc>
                   <a:txBody>
-                    <a:bodyPr wrap="square"/>
+                    <a:bodyPr/>
                     <a:lstStyle/>
                     <a:p>
                       <a:pPr algn="ctr"/>
@@ -9187,7 +10916,7 @@
                 </a:tc>
                 <a:tc>
                   <a:txBody>
-                    <a:bodyPr wrap="square"/>
+                    <a:bodyPr/>
                     <a:lstStyle/>
                     <a:p>
                       <a:pPr algn="ctr"/>
@@ -9205,7 +10934,7 @@
                 </a:tc>
                 <a:tc>
                   <a:txBody>
-                    <a:bodyPr wrap="square"/>
+                    <a:bodyPr/>
                     <a:lstStyle/>
                     <a:p>
                       <a:pPr algn="ctr"/>
@@ -9223,7 +10952,7 @@
                 </a:tc>
                 <a:tc>
                   <a:txBody>
-                    <a:bodyPr wrap="square"/>
+                    <a:bodyPr/>
                     <a:lstStyle/>
                     <a:p>
                       <a:pPr algn="ctr"/>
@@ -9239,11 +10968,16 @@
                     </a:solidFill>
                   </a:tcPr>
                 </a:tc>
+                <a:extLst>
+                  <a:ext uri="{0D108BD9-81ED-4DB2-BD59-A6C34878D82A}">
+                    <a16:rowId xmlns:a16="http://schemas.microsoft.com/office/drawing/2014/main" val="10000"/>
+                  </a:ext>
+                </a:extLst>
               </a:tr>
               <a:tr h="560000">
                 <a:tc>
                   <a:txBody>
-                    <a:bodyPr wrap="square"/>
+                    <a:bodyPr/>
                     <a:lstStyle/>
                     <a:p>
                       <a:pPr algn="ctr"/>
@@ -9254,7 +10988,7 @@
                 </a:tc>
                 <a:tc>
                   <a:txBody>
-                    <a:bodyPr wrap="square"/>
+                    <a:bodyPr/>
                     <a:lstStyle/>
                     <a:p>
                       <a:pPr algn="ctr"/>
@@ -9265,7 +10999,7 @@
                 </a:tc>
                 <a:tc>
                   <a:txBody>
-                    <a:bodyPr wrap="square"/>
+                    <a:bodyPr/>
                     <a:lstStyle/>
                     <a:p>
                       <a:pPr algn="ctr"/>
@@ -9276,7 +11010,7 @@
                 </a:tc>
                 <a:tc>
                   <a:txBody>
-                    <a:bodyPr wrap="square"/>
+                    <a:bodyPr/>
                     <a:lstStyle/>
                     <a:p>
                       <a:pPr algn="ctr"/>
@@ -9287,7 +11021,7 @@
                 </a:tc>
                 <a:tc>
                   <a:txBody>
-                    <a:bodyPr wrap="square"/>
+                    <a:bodyPr/>
                     <a:lstStyle/>
                     <a:p>
                       <a:pPr algn="ctr"/>
@@ -9298,7 +11032,7 @@
                 </a:tc>
                 <a:tc>
                   <a:txBody>
-                    <a:bodyPr wrap="square"/>
+                    <a:bodyPr/>
                     <a:lstStyle/>
                     <a:p>
                       <a:pPr algn="ctr"/>
@@ -9309,7 +11043,7 @@
                 </a:tc>
                 <a:tc>
                   <a:txBody>
-                    <a:bodyPr wrap="square"/>
+                    <a:bodyPr/>
                     <a:lstStyle/>
                     <a:p>
                       <a:pPr algn="ctr"/>
@@ -9320,7 +11054,7 @@
                 </a:tc>
                 <a:tc>
                   <a:txBody>
-                    <a:bodyPr wrap="square"/>
+                    <a:bodyPr/>
                     <a:lstStyle/>
                     <a:p>
                       <a:pPr algn="ctr"/>
@@ -9329,6 +11063,11 @@
                   </a:txBody>
                   <a:tcPr marL="60000" marR="60000" marT="25000" marB="25000" anchor="ctr"/>
                 </a:tc>
+                <a:extLst>
+                  <a:ext uri="{0D108BD9-81ED-4DB2-BD59-A6C34878D82A}">
+                    <a16:rowId xmlns:a16="http://schemas.microsoft.com/office/drawing/2014/main" val="10001"/>
+                  </a:ext>
+                </a:extLst>
               </a:tr>
             </a:tbl>
           </a:graphicData>
@@ -9342,8 +11081,8 @@
 </p:sld>
 </file>
 
-<file path=ppt/slides/slide7.xml><?xml version="1.0" encoding="utf-8"?>
-<p:sld xmlns:a="http://schemas.openxmlformats.org/drawingml/2006/main" xmlns:p="http://schemas.openxmlformats.org/presentationml/2006/main" xmlns:r="http://schemas.openxmlformats.org/officeDocument/2006/relationships">
+<file path=ppt/slides/slide9.xml><?xml version="1.0" encoding="utf-8"?>
+<p:sld xmlns:a="http://schemas.openxmlformats.org/drawingml/2006/main" xmlns:r="http://schemas.openxmlformats.org/officeDocument/2006/relationships" xmlns:p="http://schemas.openxmlformats.org/presentationml/2006/main">
   <p:cSld>
     <p:spTree>
       <p:nvGrpSpPr>
@@ -9351,7 +11090,14 @@
         <p:cNvGrpSpPr/>
         <p:nvPr/>
       </p:nvGrpSpPr>
-      <p:grpSpPr/>
+      <p:grpSpPr>
+        <a:xfrm>
+          <a:off x="0" y="0"/>
+          <a:ext cx="0" cy="0"/>
+          <a:chOff x="0" y="0"/>
+          <a:chExt cx="0" cy="0"/>
+        </a:xfrm>
+      </p:grpSpPr>
       <p:sp>
         <p:nvSpPr>
           <p:cNvPr id="2" name="Title 1"/>
@@ -9456,23 +11202,71 @@
         <a:graphic>
           <a:graphicData uri="http://schemas.openxmlformats.org/drawingml/2006/table">
             <a:tbl>
-              <a:tblPr firstRow="1" bandRow="0">
+              <a:tblPr firstRow="1">
                 <a:tableStyleId>{5940675A-B579-460E-94D1-54222C63F5DA}</a:tableStyleId>
               </a:tblPr>
               <a:tblGrid>
-                <a:gridCol w="900000"/>
-                <a:gridCol w="900000"/>
-                <a:gridCol w="900000"/>
-                <a:gridCol w="900000"/>
-                <a:gridCol w="900000"/>
-                <a:gridCol w="900000"/>
-                <a:gridCol w="900000"/>
-                <a:gridCol w="900000"/>
+                <a:gridCol w="900000">
+                  <a:extLst>
+                    <a:ext uri="{9D8B030D-6E8A-4147-A177-3AD203B41FA5}">
+                      <a16:colId xmlns:a16="http://schemas.microsoft.com/office/drawing/2014/main" val="20000"/>
+                    </a:ext>
+                  </a:extLst>
+                </a:gridCol>
+                <a:gridCol w="900000">
+                  <a:extLst>
+                    <a:ext uri="{9D8B030D-6E8A-4147-A177-3AD203B41FA5}">
+                      <a16:colId xmlns:a16="http://schemas.microsoft.com/office/drawing/2014/main" val="20001"/>
+                    </a:ext>
+                  </a:extLst>
+                </a:gridCol>
+                <a:gridCol w="900000">
+                  <a:extLst>
+                    <a:ext uri="{9D8B030D-6E8A-4147-A177-3AD203B41FA5}">
+                      <a16:colId xmlns:a16="http://schemas.microsoft.com/office/drawing/2014/main" val="20002"/>
+                    </a:ext>
+                  </a:extLst>
+                </a:gridCol>
+                <a:gridCol w="900000">
+                  <a:extLst>
+                    <a:ext uri="{9D8B030D-6E8A-4147-A177-3AD203B41FA5}">
+                      <a16:colId xmlns:a16="http://schemas.microsoft.com/office/drawing/2014/main" val="20003"/>
+                    </a:ext>
+                  </a:extLst>
+                </a:gridCol>
+                <a:gridCol w="900000">
+                  <a:extLst>
+                    <a:ext uri="{9D8B030D-6E8A-4147-A177-3AD203B41FA5}">
+                      <a16:colId xmlns:a16="http://schemas.microsoft.com/office/drawing/2014/main" val="20004"/>
+                    </a:ext>
+                  </a:extLst>
+                </a:gridCol>
+                <a:gridCol w="900000">
+                  <a:extLst>
+                    <a:ext uri="{9D8B030D-6E8A-4147-A177-3AD203B41FA5}">
+                      <a16:colId xmlns:a16="http://schemas.microsoft.com/office/drawing/2014/main" val="20005"/>
+                    </a:ext>
+                  </a:extLst>
+                </a:gridCol>
+                <a:gridCol w="900000">
+                  <a:extLst>
+                    <a:ext uri="{9D8B030D-6E8A-4147-A177-3AD203B41FA5}">
+                      <a16:colId xmlns:a16="http://schemas.microsoft.com/office/drawing/2014/main" val="20006"/>
+                    </a:ext>
+                  </a:extLst>
+                </a:gridCol>
+                <a:gridCol w="900000">
+                  <a:extLst>
+                    <a:ext uri="{9D8B030D-6E8A-4147-A177-3AD203B41FA5}">
+                      <a16:colId xmlns:a16="http://schemas.microsoft.com/office/drawing/2014/main" val="20007"/>
+                    </a:ext>
+                  </a:extLst>
+                </a:gridCol>
               </a:tblGrid>
               <a:tr h="560000">
                 <a:tc>
                   <a:txBody>
-                    <a:bodyPr wrap="square"/>
+                    <a:bodyPr/>
                     <a:lstStyle/>
                     <a:p>
                       <a:pPr algn="ctr"/>
@@ -9490,7 +11284,7 @@
                 </a:tc>
                 <a:tc>
                   <a:txBody>
-                    <a:bodyPr wrap="square"/>
+                    <a:bodyPr/>
                     <a:lstStyle/>
                     <a:p>
                       <a:pPr algn="ctr"/>
@@ -9508,7 +11302,7 @@
                 </a:tc>
                 <a:tc>
                   <a:txBody>
-                    <a:bodyPr wrap="square"/>
+                    <a:bodyPr/>
                     <a:lstStyle/>
                     <a:p>
                       <a:pPr algn="ctr"/>
@@ -9526,7 +11320,7 @@
                 </a:tc>
                 <a:tc>
                   <a:txBody>
-                    <a:bodyPr wrap="square"/>
+                    <a:bodyPr/>
                     <a:lstStyle/>
                     <a:p>
                       <a:pPr algn="ctr"/>
@@ -9544,7 +11338,7 @@
                 </a:tc>
                 <a:tc>
                   <a:txBody>
-                    <a:bodyPr wrap="square"/>
+                    <a:bodyPr/>
                     <a:lstStyle/>
                     <a:p>
                       <a:pPr algn="ctr"/>
@@ -9562,7 +11356,7 @@
                 </a:tc>
                 <a:tc>
                   <a:txBody>
-                    <a:bodyPr wrap="square"/>
+                    <a:bodyPr/>
                     <a:lstStyle/>
                     <a:p>
                       <a:pPr algn="ctr"/>
@@ -9580,7 +11374,7 @@
                 </a:tc>
                 <a:tc>
                   <a:txBody>
-                    <a:bodyPr wrap="square"/>
+                    <a:bodyPr/>
                     <a:lstStyle/>
                     <a:p>
                       <a:pPr algn="ctr"/>
@@ -9598,7 +11392,7 @@
                 </a:tc>
                 <a:tc>
                   <a:txBody>
-                    <a:bodyPr wrap="square"/>
+                    <a:bodyPr/>
                     <a:lstStyle/>
                     <a:p>
                       <a:pPr algn="ctr"/>
@@ -9614,11 +11408,16 @@
                     </a:solidFill>
                   </a:tcPr>
                 </a:tc>
+                <a:extLst>
+                  <a:ext uri="{0D108BD9-81ED-4DB2-BD59-A6C34878D82A}">
+                    <a16:rowId xmlns:a16="http://schemas.microsoft.com/office/drawing/2014/main" val="10000"/>
+                  </a:ext>
+                </a:extLst>
               </a:tr>
               <a:tr h="560000">
                 <a:tc>
                   <a:txBody>
-                    <a:bodyPr wrap="square"/>
+                    <a:bodyPr/>
                     <a:lstStyle/>
                     <a:p>
                       <a:pPr algn="ctr"/>
@@ -9636,7 +11435,7 @@
                 </a:tc>
                 <a:tc>
                   <a:txBody>
-                    <a:bodyPr wrap="square"/>
+                    <a:bodyPr/>
                     <a:lstStyle/>
                     <a:p>
                       <a:pPr algn="ctr"/>
@@ -9654,7 +11453,7 @@
                 </a:tc>
                 <a:tc>
                   <a:txBody>
-                    <a:bodyPr wrap="square"/>
+                    <a:bodyPr/>
                     <a:lstStyle/>
                     <a:p>
                       <a:pPr algn="ctr"/>
@@ -9672,7 +11471,7 @@
                 </a:tc>
                 <a:tc>
                   <a:txBody>
-                    <a:bodyPr wrap="square"/>
+                    <a:bodyPr/>
                     <a:lstStyle/>
                     <a:p>
                       <a:pPr algn="ctr"/>
@@ -9690,7 +11489,7 @@
                 </a:tc>
                 <a:tc>
                   <a:txBody>
-                    <a:bodyPr wrap="square"/>
+                    <a:bodyPr/>
                     <a:lstStyle/>
                     <a:p>
                       <a:pPr algn="ctr"/>
@@ -9708,7 +11507,7 @@
                 </a:tc>
                 <a:tc>
                   <a:txBody>
-                    <a:bodyPr wrap="square"/>
+                    <a:bodyPr/>
                     <a:lstStyle/>
                     <a:p>
                       <a:pPr algn="ctr"/>
@@ -9726,7 +11525,7 @@
                 </a:tc>
                 <a:tc>
                   <a:txBody>
-                    <a:bodyPr wrap="square"/>
+                    <a:bodyPr/>
                     <a:lstStyle/>
                     <a:p>
                       <a:pPr algn="ctr"/>
@@ -9744,7 +11543,7 @@
                 </a:tc>
                 <a:tc>
                   <a:txBody>
-                    <a:bodyPr wrap="square"/>
+                    <a:bodyPr/>
                     <a:lstStyle/>
                     <a:p>
                       <a:pPr algn="ctr"/>
@@ -9760,324 +11559,16 @@
                   </a:txBody>
                   <a:tcPr marL="60000" marR="60000" marT="25000" marB="25000" anchor="ctr"/>
                 </a:tc>
+                <a:extLst>
+                  <a:ext uri="{0D108BD9-81ED-4DB2-BD59-A6C34878D82A}">
+                    <a16:rowId xmlns:a16="http://schemas.microsoft.com/office/drawing/2014/main" val="10001"/>
+                  </a:ext>
+                </a:extLst>
               </a:tr>
             </a:tbl>
           </a:graphicData>
         </a:graphic>
       </p:graphicFrame>
-    </p:spTree>
-  </p:cSld>
-  <p:clrMapOvr>
-    <a:masterClrMapping/>
-  </p:clrMapOvr>
-</p:sld>
-</file>
-
-<file path=ppt/slides/slide8.xml><?xml version="1.0" encoding="utf-8"?>
-<p:sld xmlns:a="http://schemas.openxmlformats.org/drawingml/2006/main" xmlns:p="http://schemas.openxmlformats.org/presentationml/2006/main" xmlns:r="http://schemas.openxmlformats.org/officeDocument/2006/relationships">
-  <p:cSld>
-    <p:spTree>
-      <p:nvGrpSpPr>
-        <p:cNvPr id="1" name=""/>
-        <p:cNvGrpSpPr/>
-        <p:nvPr/>
-      </p:nvGrpSpPr>
-      <p:grpSpPr/>
-      <p:sp>
-        <p:nvSpPr>
-          <p:cNvPr id="2" name="Title 1"/>
-          <p:cNvSpPr>
-            <a:spLocks noGrp="1"/>
-          </p:cNvSpPr>
-          <p:nvPr>
-            <p:ph type="title"/>
-          </p:nvPr>
-        </p:nvSpPr>
-        <p:spPr>
-          <a:xfrm>
-            <a:off x="1320800" y="152400"/>
-            <a:ext cx="9575800" cy="533400"/>
-          </a:xfrm>
-        </p:spPr>
-        <p:txBody>
-          <a:bodyPr/>
-          <a:lstStyle/>
-          <a:p>
-            <a:r>
-              <a:t>Exercise: Realistic YOLO dimensions</a:t>
-            </a:r>
-          </a:p>
-        </p:txBody>
-      </p:sp>
-      <p:sp>
-        <p:nvSpPr>
-          <p:cNvPr id="3" name="Content Placeholder 2"/>
-          <p:cNvSpPr>
-            <a:spLocks noGrp="1"/>
-          </p:cNvSpPr>
-          <p:nvPr>
-            <p:ph idx="1"/>
-          </p:nvPr>
-        </p:nvSpPr>
-        <p:spPr>
-          <a:xfrm>
-            <a:off x="330000" y="800000"/>
-            <a:ext cx="11500000" cy="5500000"/>
-          </a:xfrm>
-        </p:spPr>
-        <p:txBody>
-          <a:bodyPr wrap="square"/>
-          <a:lstStyle/>
-          <a:p>
-            <a:pPr marL="0" indent="0">
-              <a:buNone/>
-            </a:pPr>
-            <a:r>
-              <a:rPr sz="2400"/>
-              <a:t>A realistic YOLO takes a </a:t>
-            </a:r>
-            <a:r>
-              <a:rPr sz="2400" b="1">
-                <a:solidFill>
-                  <a:srgbClr val="2A40E2"/>
-                </a:solidFill>
-              </a:rPr>
-              <a:t>608 × 608 × 3</a:t>
-            </a:r>
-            <a:r>
-              <a:rPr sz="2400"/>
-              <a:t> image and outputs a </a:t>
-            </a:r>
-            <a:r>
-              <a:rPr sz="2400" b="1">
-                <a:solidFill>
-                  <a:srgbClr val="2A40E2"/>
-                </a:solidFill>
-              </a:rPr>
-              <a:t>19 × 19 × 5 × 85</a:t>
-            </a:r>
-            <a:r>
-              <a:rPr sz="2400"/>
-              <a:t> tensor.</a:t>
-            </a:r>
-          </a:p>
-          <a:p>
-            <a:pPr marL="0" indent="0">
-              <a:buNone/>
-            </a:pPr>
-            <a:r>
-              <a:rPr sz="800"/>
-              <a:t> </a:t>
-            </a:r>
-          </a:p>
-          <a:p>
-            <a:pPr marL="0" indent="0">
-              <a:buNone/>
-            </a:pPr>
-            <a:r>
-              <a:rPr sz="2400"/>
-              <a:t>(a) What do 5 and 85 stand for?</a:t>
-            </a:r>
-          </a:p>
-          <a:p>
-            <a:pPr marL="0" indent="0">
-              <a:buNone/>
-            </a:pPr>
-            <a:r>
-              <a:rPr sz="2400"/>
-              <a:t>(b) How many numbers are predicted, and how many candidate boxes enter NMS?</a:t>
-            </a:r>
-          </a:p>
-          <a:p>
-            <a:pPr marL="0" indent="0">
-              <a:buNone/>
-            </a:pPr>
-            <a:r>
-              <a:rPr sz="2400"/>
-              <a:t>(c) What is the stride (pixels per grid cell)? In which cell (row, col from 0) does an object with mid-point at pixel (330, 200) fall, and what are (bx, by) of its label?</a:t>
-            </a:r>
-          </a:p>
-        </p:txBody>
-      </p:sp>
-    </p:spTree>
-  </p:cSld>
-  <p:clrMapOvr>
-    <a:masterClrMapping/>
-  </p:clrMapOvr>
-</p:sld>
-</file>
-
-<file path=ppt/slides/slide9.xml><?xml version="1.0" encoding="utf-8"?>
-<p:sld xmlns:a="http://schemas.openxmlformats.org/drawingml/2006/main" xmlns:p="http://schemas.openxmlformats.org/presentationml/2006/main" xmlns:r="http://schemas.openxmlformats.org/officeDocument/2006/relationships">
-  <p:cSld>
-    <p:spTree>
-      <p:nvGrpSpPr>
-        <p:cNvPr id="1" name=""/>
-        <p:cNvGrpSpPr/>
-        <p:nvPr/>
-      </p:nvGrpSpPr>
-      <p:grpSpPr/>
-      <p:sp>
-        <p:nvSpPr>
-          <p:cNvPr id="2" name="Title 1"/>
-          <p:cNvSpPr>
-            <a:spLocks noGrp="1"/>
-          </p:cNvSpPr>
-          <p:nvPr>
-            <p:ph type="title"/>
-          </p:nvPr>
-        </p:nvSpPr>
-        <p:spPr>
-          <a:xfrm>
-            <a:off x="1320800" y="152400"/>
-            <a:ext cx="9575800" cy="533400"/>
-          </a:xfrm>
-        </p:spPr>
-        <p:txBody>
-          <a:bodyPr/>
-          <a:lstStyle/>
-          <a:p>
-            <a:r>
-              <a:t>Exercise Solution: Realistic YOLO dimensions</a:t>
-            </a:r>
-          </a:p>
-        </p:txBody>
-      </p:sp>
-      <p:sp>
-        <p:nvSpPr>
-          <p:cNvPr id="3" name="Content Placeholder 2"/>
-          <p:cNvSpPr>
-            <a:spLocks noGrp="1"/>
-          </p:cNvSpPr>
-          <p:nvPr>
-            <p:ph idx="1"/>
-          </p:nvPr>
-        </p:nvSpPr>
-        <p:spPr>
-          <a:xfrm>
-            <a:off x="330000" y="800000"/>
-            <a:ext cx="11500000" cy="5500000"/>
-          </a:xfrm>
-        </p:spPr>
-        <p:txBody>
-          <a:bodyPr wrap="square"/>
-          <a:lstStyle/>
-          <a:p>
-            <a:r>
-              <a:rPr sz="2400"/>
-              <a:t>(a) </a:t>
-            </a:r>
-            <a:r>
-              <a:rPr sz="2400" b="1">
-                <a:solidFill>
-                  <a:srgbClr val="2A40E2"/>
-                </a:solidFill>
-              </a:rPr>
-              <a:t>5 anchor boxes</a:t>
-            </a:r>
-            <a:r>
-              <a:rPr sz="2400"/>
-              <a:t> per cell; 85 = 5 + 80: (pc, bx, by, bh, bw) plus </a:t>
-            </a:r>
-            <a:r>
-              <a:rPr sz="2400" b="1">
-                <a:solidFill>
-                  <a:srgbClr val="2A40E2"/>
-                </a:solidFill>
-              </a:rPr>
-              <a:t>80 class scores</a:t>
-            </a:r>
-            <a:r>
-              <a:rPr sz="2400"/>
-              <a:t>.</a:t>
-            </a:r>
-          </a:p>
-          <a:p>
-            <a:r>
-              <a:rPr sz="2400"/>
-              <a:t>(b) 19 × 19 × 5 × 85 = </a:t>
-            </a:r>
-            <a:r>
-              <a:rPr sz="2400" b="1">
-                <a:solidFill>
-                  <a:srgbClr val="2A40E2"/>
-                </a:solidFill>
-              </a:rPr>
-              <a:t>153,425</a:t>
-            </a:r>
-            <a:r>
-              <a:rPr sz="2400"/>
-              <a:t> numbers; 19 × 19 × 5 = </a:t>
-            </a:r>
-            <a:r>
-              <a:rPr sz="2400" b="1">
-                <a:solidFill>
-                  <a:srgbClr val="2A40E2"/>
-                </a:solidFill>
-              </a:rPr>
-              <a:t>1,805</a:t>
-            </a:r>
-            <a:r>
-              <a:rPr sz="2400"/>
-              <a:t> candidate boxes before NMS.</a:t>
-            </a:r>
-          </a:p>
-          <a:p>
-            <a:r>
-              <a:rPr sz="2400"/>
-              <a:t>(c) Stride 608/19 = </a:t>
-            </a:r>
-            <a:r>
-              <a:rPr sz="2400" b="1">
-                <a:solidFill>
-                  <a:srgbClr val="2A40E2"/>
-                </a:solidFill>
-              </a:rPr>
-              <a:t>32 px</a:t>
-            </a:r>
-            <a:r>
-              <a:rPr sz="2400"/>
-              <a:t>. col = ⌊330/32⌋ = 10, row = ⌊200/32⌋ = 6 → </a:t>
-            </a:r>
-            <a:r>
-              <a:rPr sz="2400" b="1">
-                <a:solidFill>
-                  <a:srgbClr val="2A40E2"/>
-                </a:solidFill>
-              </a:rPr>
-              <a:t>cell (6, 10)</a:t>
-            </a:r>
-            <a:r>
-              <a:rPr sz="2400"/>
-              <a:t>; bx = (330 − 320)/32 = </a:t>
-            </a:r>
-            <a:r>
-              <a:rPr sz="2400" b="1">
-                <a:solidFill>
-                  <a:srgbClr val="2A40E2"/>
-                </a:solidFill>
-              </a:rPr>
-              <a:t>0.31</a:t>
-            </a:r>
-            <a:r>
-              <a:rPr sz="2400"/>
-              <a:t>, by = (200 − 192)/32 = </a:t>
-            </a:r>
-            <a:r>
-              <a:rPr sz="2400" b="1">
-                <a:solidFill>
-                  <a:srgbClr val="2A40E2"/>
-                </a:solidFill>
-              </a:rPr>
-              <a:t>0.25</a:t>
-            </a:r>
-            <a:r>
-              <a:rPr sz="2400"/>
-              <a:t>.</a:t>
-            </a:r>
-          </a:p>
-        </p:txBody>
-      </p:sp>
     </p:spTree>
   </p:cSld>
   <p:clrMapOvr>
